--- a/00-01_han-ai/training-materials/course02_jissen_bunsho.pptx
+++ b/00-01_han-ai/training-materials/course02_jissen_bunsho.pptx
@@ -19,8 +19,6 @@
     <p:sldId id="267" r:id="rId18"/>
     <p:sldId id="268" r:id="rId19"/>
     <p:sldId id="269" r:id="rId20"/>
-    <p:sldId id="270" r:id="rId21"/>
-    <p:sldId id="271" r:id="rId22"/>
     <p:sldId id="272" r:id="rId23"/>
     <p:sldId id="273" r:id="rId24"/>
   </p:sldIdLst>
@@ -3416,7 +3414,7 @@
                   <a:srgbClr val="FFFFFF"/>
                 </a:solidFill>
               </a:rPr>
-              <a:t>広報・発信文書 — 実践②（自由テーマ）：想起リスト</a:t>
+              <a:t>文書→表データ変換 — 実践②（全員共通）：アンケート→集計分類表</a:t>
             </a:r>
           </a:p>
         </p:txBody>
@@ -3450,7 +3448,7 @@
                   <a:srgbClr val="93C5FD"/>
                 </a:solidFill>
               </a:rPr>
-              <a:t>[実践10分 + 見せ合い5分]</a:t>
+              <a:t>[実践15分]</a:t>
             </a:r>
           </a:p>
         </p:txBody>
@@ -3477,14 +3475,23 @@
           </a:bodyPr>
           <a:lstStyle/>
           <a:p>
-            <a:pPr algn="l"/>
             <a:r>
               <a:rPr sz="1300" b="0" i="0">
                 <a:solidFill>
                   <a:srgbClr val="64748B"/>
                 </a:solidFill>
               </a:rPr>
-              <a:t>こんな発信もAIで下書きできます</a:t>
+              <a:t>お題：「このアンケート回答をカテゴリ別に集計してまとめた表を作って」</a:t>
+            </a:r>
+          </a:p>
+          <a:p>
+            <a:r>
+              <a:rPr sz="1300" b="0" i="0">
+                <a:solidFill>
+                  <a:srgbClr val="64748B"/>
+                </a:solidFill>
+              </a:rPr>
+              <a:t>操作：スプレッドシートのアンケート結果を全選択 → Geminiに貼り付け</a:t>
             </a:r>
           </a:p>
         </p:txBody>
@@ -3993,7 +4000,7 @@
                   <a:srgbClr val="FFFFFF"/>
                 </a:solidFill>
               </a:rPr>
-              <a:t>採用広報</a:t>
+              <a:t>表→文書一括生成</a:t>
             </a:r>
           </a:p>
         </p:txBody>
@@ -4061,7 +4068,7 @@
                   <a:srgbClr val="BFDBFE"/>
                 </a:solidFill>
               </a:rPr>
-              <a:t>求人票・会社紹介文・採用SNS投稿を作る</a:t>
+              <a:t>商品リスト・顧客リストをGeminiに貼り付けて文書を量産する</a:t>
             </a:r>
           </a:p>
         </p:txBody>
@@ -4156,7 +4163,7 @@
                   <a:srgbClr val="FFFFFF"/>
                 </a:solidFill>
               </a:rPr>
-              <a:t>採用広報 — 実践①（全員共通）：求人票</a:t>
+              <a:t>表→文書一括生成 — 実践①（全員共通）：商品リスト→SNS投稿</a:t>
             </a:r>
           </a:p>
         </p:txBody>
@@ -4260,14 +4267,23 @@
           </a:bodyPr>
           <a:lstStyle/>
           <a:p>
-            <a:pPr algn="l"/>
             <a:r>
               <a:rPr sz="1400" b="1" i="0">
                 <a:solidFill>
                   <a:srgbClr val="1E293B"/>
                 </a:solidFill>
               </a:rPr>
-              <a:t>お題：「職種・条件・自社の魅力を入れて求人票を作って」</a:t>
+              <a:t>お題：「この商品リストの各商品についてInstagram投稿文を1本ずつ作って」</a:t>
+            </a:r>
+          </a:p>
+          <a:p>
+            <a:r>
+              <a:rPr sz="1400" b="1" i="0">
+                <a:solidFill>
+                  <a:srgbClr val="1E293B"/>
+                </a:solidFill>
+              </a:rPr>
+              <a:t>操作：スプレッドシートの商品リストを全選択 → Geminiに貼り付け → 一括生成</a:t>
             </a:r>
           </a:p>
         </p:txBody>
@@ -4637,14 +4653,13 @@
           </a:bodyPr>
           <a:lstStyle/>
           <a:p>
-            <a:pPr algn="l"/>
             <a:r>
               <a:rPr sz="1300" b="1" i="0">
                 <a:solidFill>
                   <a:srgbClr val="1E40AF"/>
                 </a:solidFill>
               </a:rPr>
-              <a:t>ポイント：自社の強みを「普通の言葉」でAIに伝えると、うまく文章化してくれます</a:t>
+              <a:t>複数の投稿文が一度に生成されます。コピーして使うだけです</a:t>
             </a:r>
           </a:p>
         </p:txBody>
@@ -4739,7 +4754,7 @@
                   <a:srgbClr val="FFFFFF"/>
                 </a:solidFill>
               </a:rPr>
-              <a:t>採用広報 — 実践②（自由テーマ）：想起リスト</a:t>
+              <a:t>表→文書一括生成 — 実践②（全員共通）：顧客リスト→フォローメール</a:t>
             </a:r>
           </a:p>
         </p:txBody>
@@ -4773,7 +4788,7 @@
                   <a:srgbClr val="93C5FD"/>
                 </a:solidFill>
               </a:rPr>
-              <a:t>[実践10分 + 見せ合い5分]</a:t>
+              <a:t>[実践15分]</a:t>
             </a:r>
           </a:p>
         </p:txBody>
@@ -4800,14 +4815,23 @@
           </a:bodyPr>
           <a:lstStyle/>
           <a:p>
-            <a:pPr algn="l"/>
             <a:r>
               <a:rPr sz="1300" b="0" i="0">
                 <a:solidFill>
                   <a:srgbClr val="64748B"/>
                 </a:solidFill>
               </a:rPr>
-              <a:t>採用活動全体をAIがサポートします</a:t>
+              <a:t>お題：「この顧客リストの各社に向けた個別フォローメールをそれぞれ作って」</a:t>
+            </a:r>
+          </a:p>
+          <a:p>
+            <a:r>
+              <a:rPr sz="1300" b="0" i="0">
+                <a:solidFill>
+                  <a:srgbClr val="64748B"/>
+                </a:solidFill>
+              </a:rPr>
+              <a:t>操作：顧客リスト（社名・担当者名）をGeminiに貼り付け</a:t>
             </a:r>
           </a:p>
         </p:txBody>
@@ -5793,7 +5817,7 @@
                   <a:srgbClr val="FFFFFF"/>
                 </a:solidFill>
               </a:rPr>
-              <a:t>6</a:t>
+              <a:t>5</a:t>
             </a:r>
           </a:p>
         </p:txBody>
@@ -5861,7 +5885,7 @@
                   <a:srgbClr val="93C5FD"/>
                 </a:solidFill>
               </a:rPr>
-              <a:t>[5分]</a:t>
+              <a:t>[8分]</a:t>
             </a:r>
           </a:p>
         </p:txBody>
@@ -6026,14 +6050,43 @@
           </a:bodyPr>
           <a:lstStyle/>
           <a:p>
-            <a:pPr algn="l"/>
             <a:r>
               <a:rPr sz="1300" b="1" i="0">
                 <a:solidFill>
                   <a:srgbClr val="1E40AF"/>
                 </a:solidFill>
               </a:rPr>
-              <a:t>次のステップ | ざつね屋のサービス案内</a:t>
+              <a:t>今日の3方向まとめ</a:t>
+            </a:r>
+          </a:p>
+          <a:p>
+            <a:r>
+              <a:rPr sz="1300" b="1" i="0">
+                <a:solidFill>
+                  <a:srgbClr val="1E40AF"/>
+                </a:solidFill>
+              </a:rPr>
+              <a:t>① 文書生成（議事録・メール・SNS投稿）</a:t>
+            </a:r>
+          </a:p>
+          <a:p>
+            <a:r>
+              <a:rPr sz="1300" b="1" i="0">
+                <a:solidFill>
+                  <a:srgbClr val="1E40AF"/>
+                </a:solidFill>
+              </a:rPr>
+              <a:t>② 文書→表（議事録→タスク表・アンケート→集計表）</a:t>
+            </a:r>
+          </a:p>
+          <a:p>
+            <a:r>
+              <a:rPr sz="1300" b="1" i="0">
+                <a:solidFill>
+                  <a:srgbClr val="1E40AF"/>
+                </a:solidFill>
+              </a:rPr>
+              <a:t>③ 表→文書（商品リスト・顧客リスト→一括生成）</a:t>
             </a:r>
           </a:p>
         </p:txBody>
@@ -6066,17 +6119,7 @@
                   <a:srgbClr val="1E293B"/>
                 </a:solidFill>
               </a:rPr>
-              <a:t>📚 実践編（画像・動画・Claude Code）— 発信力・自動化をさらに強化する</a:t>
-            </a:r>
-          </a:p>
-          <a:p>
-            <a:r>
-              <a:rPr sz="1200" b="0" i="0">
-                <a:solidFill>
-                  <a:srgbClr val="1E293B"/>
-                </a:solidFill>
-              </a:rPr>
-              <a:t>🛠 AI業務改善オーダーメイド・🤝 AI開発伴走 — 自社の課題を一緒に解決する</a:t>
+              <a:t>スライドのプロンプト例は [ ] を書き換えるだけで使えます。明日から試してみてください</a:t>
             </a:r>
           </a:p>
         </p:txBody>
@@ -7360,14 +7403,13 @@
           </a:bodyPr>
           <a:lstStyle/>
           <a:p>
-            <a:pPr algn="l"/>
             <a:r>
               <a:rPr sz="1300" b="0" i="0">
                 <a:solidFill>
                   <a:srgbClr val="1E293B"/>
                 </a:solidFill>
               </a:rPr>
-              <a:t>ひな型（全セクション共通）：「あなたは[役割]です。[状況]の[文書の種類]を[形式]で作成してください」</a:t>
+              <a:t>ゴール：実践でプロンプトの感覚をつかむ。スライドのプロンプト例は [ ] を書き換えるだけで使えます</a:t>
             </a:r>
           </a:p>
         </p:txBody>
@@ -8250,7 +8292,7 @@
                   <a:srgbClr val="FFFFFF"/>
                 </a:solidFill>
               </a:rPr>
-              <a:t>社内文書 — 実践②（自由テーマ）：想起リスト</a:t>
+              <a:t>社内文書 — 実践②（全員共通）：クレーム対応メール</a:t>
             </a:r>
           </a:p>
         </p:txBody>
@@ -8284,7 +8326,7 @@
                   <a:srgbClr val="93C5FD"/>
                 </a:solidFill>
               </a:rPr>
-              <a:t>[実践10分 + 見せ合い5分]</a:t>
+              <a:t>[実践15分]</a:t>
             </a:r>
           </a:p>
         </p:txBody>
@@ -8311,14 +8353,23 @@
           </a:bodyPr>
           <a:lstStyle/>
           <a:p>
-            <a:pPr algn="l"/>
             <a:r>
               <a:rPr sz="1300" b="0" i="0">
                 <a:solidFill>
                   <a:srgbClr val="64748B"/>
                 </a:solidFill>
               </a:rPr>
-              <a:t>こんな文書もAIで作れます — 好きなテーマを選んでプロンプトを試してみてください</a:t>
+              <a:t>お題：「先週受けたクレームのメモを渡すから、丁寧なお詫びと対応策のメールを書いて」</a:t>
+            </a:r>
+          </a:p>
+          <a:p>
+            <a:r>
+              <a:rPr sz="1300" b="0" i="0">
+                <a:solidFill>
+                  <a:srgbClr val="64748B"/>
+                </a:solidFill>
+              </a:rPr>
+              <a:t>ポイント：クレーム内容の「事実」と「感情」を両方AIに伝えると、より適切な文面になります</a:t>
             </a:r>
           </a:p>
         </p:txBody>
@@ -8733,7 +8784,7 @@
                   <a:srgbClr val="FFFFFF"/>
                 </a:solidFill>
               </a:rPr>
-              <a:t>広報・発信文書</a:t>
+              <a:t>文書→表データ変換</a:t>
             </a:r>
           </a:p>
         </p:txBody>
@@ -8801,7 +8852,7 @@
                   <a:srgbClr val="BFDBFE"/>
                 </a:solidFill>
               </a:rPr>
-              <a:t>SNS投稿・チラシ・HPテキストを作る</a:t>
+              <a:t>議事録→タスク表 ／ アンケート→集計表。スプレッドシートに貼り付けて完成</a:t>
             </a:r>
           </a:p>
         </p:txBody>
@@ -8896,7 +8947,7 @@
                   <a:srgbClr val="FFFFFF"/>
                 </a:solidFill>
               </a:rPr>
-              <a:t>広報・発信文書 — 実践①（全員共通）：SNS投稿文</a:t>
+              <a:t>文書→表データ変換 — 実践①（全員共通）：議事録→タスク表</a:t>
             </a:r>
           </a:p>
         </p:txBody>
@@ -9000,14 +9051,13 @@
           </a:bodyPr>
           <a:lstStyle/>
           <a:p>
-            <a:pPr algn="l"/>
             <a:r>
               <a:rPr sz="1400" b="1" i="0">
                 <a:solidFill>
                   <a:srgbClr val="1E293B"/>
                 </a:solidFill>
               </a:rPr>
-              <a:t>お題：「自社の商品・サービス・お知らせを Instagram / Facebook 投稿1本分作って」</a:t>
+              <a:t>お題：「この議事録から担当者・タスク・期限の一覧表を作って、CSVで出力して」</a:t>
             </a:r>
           </a:p>
         </p:txBody>
@@ -9377,14 +9427,13 @@
           </a:bodyPr>
           <a:lstStyle/>
           <a:p>
-            <a:pPr algn="l"/>
             <a:r>
               <a:rPr sz="1300" b="1" i="0">
                 <a:solidFill>
                   <a:srgbClr val="1E40AF"/>
                 </a:solidFill>
               </a:rPr>
-              <a:t>ポイント：AIの文章はそのまま使わず「人間のチェック」を入れることで質が上がる</a:t>
+              <a:t>操作：スプレッドシートを全選択（Ctrl+A）→ コピー（Ctrl+C）→ Geminiに貼り付け</a:t>
             </a:r>
           </a:p>
         </p:txBody>

--- a/00-01_han-ai/training-materials/course02_jissen_bunsho.pptx
+++ b/00-01_han-ai/training-materials/course02_jissen_bunsho.pptx
@@ -3099,7 +3099,7 @@
     <p:bg>
       <p:bgPr>
         <a:solidFill>
-          <a:srgbClr val="1E40AF"/>
+          <a:srgbClr val="1C1C1C"/>
         </a:solidFill>
         <a:effectLst/>
       </p:bgPr>
@@ -3180,7 +3180,7 @@
             <a:r>
               <a:rPr sz="1300" b="0" i="0">
                 <a:solidFill>
-                  <a:srgbClr val="93C5FD"/>
+                  <a:srgbClr val="DA7756"/>
                 </a:solidFill>
               </a:rPr>
               <a:t>ざつね屋</a:t>
@@ -3214,7 +3214,7 @@
             <a:r>
               <a:rPr sz="1800" b="0" i="0">
                 <a:solidFill>
-                  <a:srgbClr val="BFDBFE"/>
+                  <a:srgbClr val="B8A99A"/>
                 </a:solidFill>
               </a:rPr>
               <a:t>コース ②</a:t>
@@ -3282,7 +3282,7 @@
             <a:r>
               <a:rPr sz="1600" b="0" i="0">
                 <a:solidFill>
-                  <a:srgbClr val="BFDBFE"/>
+                  <a:srgbClr val="B8A99A"/>
                 </a:solidFill>
               </a:rPr>
               <a:t>AIで文書作業を大幅効率化する 120分</a:t>
@@ -3316,7 +3316,7 @@
             <a:r>
               <a:rPr sz="1300" b="0" i="0">
                 <a:solidFill>
-                  <a:srgbClr val="93C5FD"/>
+                  <a:srgbClr val="DA7756"/>
                 </a:solidFill>
               </a:rPr>
               <a:t>ツール：Gemini（無料版）　｜　成果物：業務別プロンプトライブラリ10本</a:t>
@@ -3335,6 +3335,14 @@
 <file path=ppt/slides/slide10.xml><?xml version="1.0" encoding="utf-8"?>
 <p:sld xmlns:a="http://schemas.openxmlformats.org/drawingml/2006/main" xmlns:p="http://schemas.openxmlformats.org/presentationml/2006/main" xmlns:r="http://schemas.openxmlformats.org/officeDocument/2006/relationships">
   <p:cSld>
+    <p:bg>
+      <p:bgPr>
+        <a:solidFill>
+          <a:srgbClr val="1C1C1C"/>
+        </a:solidFill>
+        <a:effectLst/>
+      </p:bgPr>
+    </p:bg>
     <p:spTree>
       <p:nvGrpSpPr>
         <p:cNvPr id="1" name=""/>
@@ -3357,7 +3365,7 @@
             <a:avLst/>
           </a:prstGeom>
           <a:solidFill>
-            <a:srgbClr val="1E40AF"/>
+            <a:srgbClr val="252525"/>
           </a:solidFill>
           <a:ln>
             <a:noFill/>
@@ -3445,7 +3453,7 @@
             <a:r>
               <a:rPr sz="1200" b="0" i="0">
                 <a:solidFill>
-                  <a:srgbClr val="93C5FD"/>
+                  <a:srgbClr val="DA7756"/>
                 </a:solidFill>
               </a:rPr>
               <a:t>[実践15分]</a:t>
@@ -3537,7 +3545,7 @@
                   </a:txBody>
                   <a:tcPr>
                     <a:solidFill>
-                      <a:srgbClr val="1E40AF"/>
+                      <a:srgbClr val="1C1C1C"/>
                     </a:solidFill>
                   </a:tcPr>
                 </a:tc>
@@ -3559,7 +3567,7 @@
                   </a:txBody>
                   <a:tcPr>
                     <a:solidFill>
-                      <a:srgbClr val="1E40AF"/>
+                      <a:srgbClr val="1C1C1C"/>
                     </a:solidFill>
                   </a:tcPr>
                 </a:tc>
@@ -3574,7 +3582,7 @@
                       <a:r>
                         <a:rPr sz="1100">
                           <a:solidFill>
-                            <a:srgbClr val="1E293B"/>
+                            <a:srgbClr val="EEEEEE"/>
                           </a:solidFill>
                         </a:rPr>
                         <a:t>チラシ・DM文案</a:t>
@@ -3592,7 +3600,7 @@
                       <a:r>
                         <a:rPr sz="1100">
                           <a:solidFill>
-                            <a:srgbClr val="1E293B"/>
+                            <a:srgbClr val="EEEEEE"/>
                           </a:solidFill>
                         </a:rPr>
                         <a:t>イベント告知・セール・新商品紹介チラシのコピー</a:t>
@@ -3612,7 +3620,7 @@
                       <a:r>
                         <a:rPr sz="1100">
                           <a:solidFill>
-                            <a:srgbClr val="1E293B"/>
+                            <a:srgbClr val="EEEEEE"/>
                           </a:solidFill>
                         </a:rPr>
                         <a:t>HP更新テキスト</a:t>
@@ -3634,7 +3642,7 @@
                       <a:r>
                         <a:rPr sz="1100">
                           <a:solidFill>
-                            <a:srgbClr val="1E293B"/>
+                            <a:srgbClr val="EEEEEE"/>
                           </a:solidFill>
                         </a:rPr>
                         <a:t>会社紹介・サービス説明・ニュースページの文章</a:t>
@@ -3658,7 +3666,7 @@
                       <a:r>
                         <a:rPr sz="1100">
                           <a:solidFill>
-                            <a:srgbClr val="1E293B"/>
+                            <a:srgbClr val="EEEEEE"/>
                           </a:solidFill>
                         </a:rPr>
                         <a:t>メルマガ・ニュースレター</a:t>
@@ -3676,7 +3684,7 @@
                       <a:r>
                         <a:rPr sz="1100">
                           <a:solidFill>
-                            <a:srgbClr val="1E293B"/>
+                            <a:srgbClr val="EEEEEE"/>
                           </a:solidFill>
                         </a:rPr>
                         <a:t>定期配信の構成と文面をたたき台で作る</a:t>
@@ -3696,7 +3704,7 @@
                       <a:r>
                         <a:rPr sz="1100">
                           <a:solidFill>
-                            <a:srgbClr val="1E293B"/>
+                            <a:srgbClr val="EEEEEE"/>
                           </a:solidFill>
                         </a:rPr>
                         <a:t>プレスリリース</a:t>
@@ -3718,7 +3726,7 @@
                       <a:r>
                         <a:rPr sz="1100">
                           <a:solidFill>
-                            <a:srgbClr val="1E293B"/>
+                            <a:srgbClr val="EEEEEE"/>
                           </a:solidFill>
                         </a:rPr>
                         <a:t>新サービス・受賞・採用募集などの告知文</a:t>
@@ -3742,7 +3750,7 @@
                       <a:r>
                         <a:rPr sz="1100">
                           <a:solidFill>
-                            <a:srgbClr val="1E293B"/>
+                            <a:srgbClr val="EEEEEE"/>
                           </a:solidFill>
                         </a:rPr>
                         <a:t>キャッチコピー案</a:t>
@@ -3760,7 +3768,7 @@
                       <a:r>
                         <a:rPr sz="1100">
                           <a:solidFill>
-                            <a:srgbClr val="1E293B"/>
+                            <a:srgbClr val="EEEEEE"/>
                           </a:solidFill>
                         </a:rPr>
                         <a:t>商品・サービスの魅力を一言で伝えるフレーズを複数案出す</a:t>
@@ -3788,7 +3796,7 @@
     <p:bg>
       <p:bgPr>
         <a:solidFill>
-          <a:srgbClr val="1E40AF"/>
+          <a:srgbClr val="1C1C1C"/>
         </a:solidFill>
         <a:effectLst/>
       </p:bgPr>
@@ -3826,7 +3834,7 @@
             <a:r>
               <a:rPr sz="4000" b="1" i="0">
                 <a:solidFill>
-                  <a:srgbClr val="BFDBFE"/>
+                  <a:srgbClr val="B8A99A"/>
                 </a:solidFill>
               </a:rPr>
               <a:t>- 休憩 -</a:t>
@@ -3860,7 +3868,7 @@
             <a:r>
               <a:rPr sz="1800" b="0" i="0">
                 <a:solidFill>
-                  <a:srgbClr val="93C5FD"/>
+                  <a:srgbClr val="DA7756"/>
                 </a:solidFill>
               </a:rPr>
               <a:t>5〜10分</a:t>
@@ -3882,7 +3890,7 @@
     <p:bg>
       <p:bgPr>
         <a:solidFill>
-          <a:srgbClr val="1E40AF"/>
+          <a:srgbClr val="1C1C1C"/>
         </a:solidFill>
         <a:effectLst/>
       </p:bgPr>
@@ -4031,7 +4039,7 @@
             <a:r>
               <a:rPr sz="1400" b="0" i="0">
                 <a:solidFill>
-                  <a:srgbClr val="93C5FD"/>
+                  <a:srgbClr val="DA7756"/>
                 </a:solidFill>
               </a:rPr>
               <a:t>[30分]</a:t>
@@ -4065,7 +4073,7 @@
             <a:r>
               <a:rPr sz="1500" b="0" i="0">
                 <a:solidFill>
-                  <a:srgbClr val="BFDBFE"/>
+                  <a:srgbClr val="B8A99A"/>
                 </a:solidFill>
               </a:rPr>
               <a:t>商品リスト・顧客リストをGeminiに貼り付けて文書を量産する</a:t>
@@ -4084,6 +4092,14 @@
 <file path=ppt/slides/slide13.xml><?xml version="1.0" encoding="utf-8"?>
 <p:sld xmlns:a="http://schemas.openxmlformats.org/drawingml/2006/main" xmlns:p="http://schemas.openxmlformats.org/presentationml/2006/main" xmlns:r="http://schemas.openxmlformats.org/officeDocument/2006/relationships">
   <p:cSld>
+    <p:bg>
+      <p:bgPr>
+        <a:solidFill>
+          <a:srgbClr val="1C1C1C"/>
+        </a:solidFill>
+        <a:effectLst/>
+      </p:bgPr>
+    </p:bg>
     <p:spTree>
       <p:nvGrpSpPr>
         <p:cNvPr id="1" name=""/>
@@ -4106,7 +4122,7 @@
             <a:avLst/>
           </a:prstGeom>
           <a:solidFill>
-            <a:srgbClr val="1E40AF"/>
+            <a:srgbClr val="252525"/>
           </a:solidFill>
           <a:ln>
             <a:noFill/>
@@ -4194,7 +4210,7 @@
             <a:r>
               <a:rPr sz="1200" b="0" i="0">
                 <a:solidFill>
-                  <a:srgbClr val="93C5FD"/>
+                  <a:srgbClr val="DA7756"/>
                 </a:solidFill>
               </a:rPr>
               <a:t>[実践15分]</a:t>
@@ -4217,7 +4233,7 @@
             <a:avLst/>
           </a:prstGeom>
           <a:solidFill>
-            <a:srgbClr val="EFF6FF"/>
+            <a:srgbClr val="2F2F2F"/>
           </a:solidFill>
           <a:ln>
             <a:noFill/>
@@ -4270,7 +4286,7 @@
             <a:r>
               <a:rPr sz="1400" b="1" i="0">
                 <a:solidFill>
-                  <a:srgbClr val="1E293B"/>
+                  <a:srgbClr val="EEEEEE"/>
                 </a:solidFill>
               </a:rPr>
               <a:t>お題：「この商品リストの各商品についてInstagram投稿文を1本ずつ作って」</a:t>
@@ -4280,7 +4296,7 @@
             <a:r>
               <a:rPr sz="1400" b="1" i="0">
                 <a:solidFill>
-                  <a:srgbClr val="1E293B"/>
+                  <a:srgbClr val="EEEEEE"/>
                 </a:solidFill>
               </a:rPr>
               <a:t>操作：スプレッドシートの商品リストを全選択 → Geminiに貼り付け → 一括生成</a:t>
@@ -4330,7 +4346,7 @@
                   </a:txBody>
                   <a:tcPr>
                     <a:solidFill>
-                      <a:srgbClr val="1E40AF"/>
+                      <a:srgbClr val="1C1C1C"/>
                     </a:solidFill>
                   </a:tcPr>
                 </a:tc>
@@ -4352,7 +4368,7 @@
                   </a:txBody>
                   <a:tcPr>
                     <a:solidFill>
-                      <a:srgbClr val="1E40AF"/>
+                      <a:srgbClr val="1C1C1C"/>
                     </a:solidFill>
                   </a:tcPr>
                 </a:tc>
@@ -4374,7 +4390,7 @@
                   </a:txBody>
                   <a:tcPr>
                     <a:solidFill>
-                      <a:srgbClr val="1E40AF"/>
+                      <a:srgbClr val="1C1C1C"/>
                     </a:solidFill>
                   </a:tcPr>
                 </a:tc>
@@ -4389,7 +4405,7 @@
                       <a:r>
                         <a:rPr sz="1100">
                           <a:solidFill>
-                            <a:srgbClr val="1E293B"/>
+                            <a:srgbClr val="EEEEEE"/>
                           </a:solidFill>
                         </a:rPr>
                         <a:t>1</a:t>
@@ -4407,7 +4423,7 @@
                       <a:r>
                         <a:rPr sz="1100">
                           <a:solidFill>
-                            <a:srgbClr val="1E293B"/>
+                            <a:srgbClr val="EEEEEE"/>
                           </a:solidFill>
                         </a:rPr>
                         <a:t>募集職種と最低限の条件（給与・勤務地・仕事内容）を手元に用意</a:t>
@@ -4425,7 +4441,7 @@
                       <a:r>
                         <a:rPr sz="1100">
                           <a:solidFill>
-                            <a:srgbClr val="1E293B"/>
+                            <a:srgbClr val="EEEEEE"/>
                           </a:solidFill>
                         </a:rPr>
                         <a:t>2分</a:t>
@@ -4445,7 +4461,7 @@
                       <a:r>
                         <a:rPr sz="1100">
                           <a:solidFill>
-                            <a:srgbClr val="1E293B"/>
+                            <a:srgbClr val="EEEEEE"/>
                           </a:solidFill>
                         </a:rPr>
                         <a:t>2</a:t>
@@ -4467,7 +4483,7 @@
                       <a:r>
                         <a:rPr sz="1100">
                           <a:solidFill>
-                            <a:srgbClr val="1E293B"/>
+                            <a:srgbClr val="EEEEEE"/>
                           </a:solidFill>
                         </a:rPr>
                         <a:t>「未経験歓迎・自社の強み・応募しやすいポイント」も含めてプロンプト入力</a:t>
@@ -4489,7 +4505,7 @@
                       <a:r>
                         <a:rPr sz="1100">
                           <a:solidFill>
-                            <a:srgbClr val="1E293B"/>
+                            <a:srgbClr val="EEEEEE"/>
                           </a:solidFill>
                         </a:rPr>
                         <a:t>5分</a:t>
@@ -4513,7 +4529,7 @@
                       <a:r>
                         <a:rPr sz="1100">
                           <a:solidFill>
-                            <a:srgbClr val="1E293B"/>
+                            <a:srgbClr val="EEEEEE"/>
                           </a:solidFill>
                         </a:rPr>
                         <a:t>3</a:t>
@@ -4531,7 +4547,7 @@
                       <a:r>
                         <a:rPr sz="1100">
                           <a:solidFill>
-                            <a:srgbClr val="1E293B"/>
+                            <a:srgbClr val="EEEEEE"/>
                           </a:solidFill>
                         </a:rPr>
                         <a:t>出力確認 → 「もう少し求職者の不安を解消する言い方に」等で調整</a:t>
@@ -4549,7 +4565,7 @@
                       <a:r>
                         <a:rPr sz="1100">
                           <a:solidFill>
-                            <a:srgbClr val="1E293B"/>
+                            <a:srgbClr val="EEEEEE"/>
                           </a:solidFill>
                         </a:rPr>
                         <a:t>5分</a:t>
@@ -4569,7 +4585,7 @@
                       <a:r>
                         <a:rPr sz="1100">
                           <a:solidFill>
-                            <a:srgbClr val="1E293B"/>
+                            <a:srgbClr val="EEEEEE"/>
                           </a:solidFill>
                         </a:rPr>
                         <a:t>4</a:t>
@@ -4591,7 +4607,7 @@
                       <a:r>
                         <a:rPr sz="1100">
                           <a:solidFill>
-                            <a:srgbClr val="1E293B"/>
+                            <a:srgbClr val="EEEEEE"/>
                           </a:solidFill>
                         </a:rPr>
                         <a:t>見せ合い・感想共有</a:t>
@@ -4613,7 +4629,7 @@
                       <a:r>
                         <a:rPr sz="1100">
                           <a:solidFill>
-                            <a:srgbClr val="1E293B"/>
+                            <a:srgbClr val="EEEEEE"/>
                           </a:solidFill>
                         </a:rPr>
                         <a:t>3分</a:t>
@@ -4656,7 +4672,7 @@
             <a:r>
               <a:rPr sz="1300" b="1" i="0">
                 <a:solidFill>
-                  <a:srgbClr val="1E40AF"/>
+                  <a:srgbClr val="1C1C1C"/>
                 </a:solidFill>
               </a:rPr>
               <a:t>複数の投稿文が一度に生成されます。コピーして使うだけです</a:t>
@@ -4675,6 +4691,14 @@
 <file path=ppt/slides/slide14.xml><?xml version="1.0" encoding="utf-8"?>
 <p:sld xmlns:a="http://schemas.openxmlformats.org/drawingml/2006/main" xmlns:p="http://schemas.openxmlformats.org/presentationml/2006/main" xmlns:r="http://schemas.openxmlformats.org/officeDocument/2006/relationships">
   <p:cSld>
+    <p:bg>
+      <p:bgPr>
+        <a:solidFill>
+          <a:srgbClr val="1C1C1C"/>
+        </a:solidFill>
+        <a:effectLst/>
+      </p:bgPr>
+    </p:bg>
     <p:spTree>
       <p:nvGrpSpPr>
         <p:cNvPr id="1" name=""/>
@@ -4697,7 +4721,7 @@
             <a:avLst/>
           </a:prstGeom>
           <a:solidFill>
-            <a:srgbClr val="1E40AF"/>
+            <a:srgbClr val="252525"/>
           </a:solidFill>
           <a:ln>
             <a:noFill/>
@@ -4785,7 +4809,7 @@
             <a:r>
               <a:rPr sz="1200" b="0" i="0">
                 <a:solidFill>
-                  <a:srgbClr val="93C5FD"/>
+                  <a:srgbClr val="DA7756"/>
                 </a:solidFill>
               </a:rPr>
               <a:t>[実践15分]</a:t>
@@ -4877,7 +4901,7 @@
                   </a:txBody>
                   <a:tcPr>
                     <a:solidFill>
-                      <a:srgbClr val="1E40AF"/>
+                      <a:srgbClr val="1C1C1C"/>
                     </a:solidFill>
                   </a:tcPr>
                 </a:tc>
@@ -4899,7 +4923,7 @@
                   </a:txBody>
                   <a:tcPr>
                     <a:solidFill>
-                      <a:srgbClr val="1E40AF"/>
+                      <a:srgbClr val="1C1C1C"/>
                     </a:solidFill>
                   </a:tcPr>
                 </a:tc>
@@ -4914,7 +4938,7 @@
                       <a:r>
                         <a:rPr sz="1100">
                           <a:solidFill>
-                            <a:srgbClr val="1E293B"/>
+                            <a:srgbClr val="EEEEEE"/>
                           </a:solidFill>
                         </a:rPr>
                         <a:t>会社紹介文</a:t>
@@ -4932,7 +4956,7 @@
                       <a:r>
                         <a:rPr sz="1100">
                           <a:solidFill>
-                            <a:srgbClr val="1E293B"/>
+                            <a:srgbClr val="EEEEEE"/>
                           </a:solidFill>
                         </a:rPr>
                         <a:t>採用ページ・合同説明会・会社案内の文章を作る</a:t>
@@ -4952,7 +4976,7 @@
                       <a:r>
                         <a:rPr sz="1100">
                           <a:solidFill>
-                            <a:srgbClr val="1E293B"/>
+                            <a:srgbClr val="EEEEEE"/>
                           </a:solidFill>
                         </a:rPr>
                         <a:t>採用広報SNS投稿</a:t>
@@ -4974,7 +4998,7 @@
                       <a:r>
                         <a:rPr sz="1100">
                           <a:solidFill>
-                            <a:srgbClr val="1E293B"/>
+                            <a:srgbClr val="EEEEEE"/>
                           </a:solidFill>
                         </a:rPr>
                         <a:t>社員の一日・職場環境・理念を発信する投稿文</a:t>
@@ -4998,7 +5022,7 @@
                       <a:r>
                         <a:rPr sz="1100">
                           <a:solidFill>
-                            <a:srgbClr val="1E293B"/>
+                            <a:srgbClr val="EEEEEE"/>
                           </a:solidFill>
                         </a:rPr>
                         <a:t>面接でよく聞く質問リスト</a:t>
@@ -5016,7 +5040,7 @@
                       <a:r>
                         <a:rPr sz="1100">
                           <a:solidFill>
-                            <a:srgbClr val="1E293B"/>
+                            <a:srgbClr val="EEEEEE"/>
                           </a:solidFill>
                         </a:rPr>
                         <a:t>職種別の想定質問と評価ポイントをまとめる</a:t>
@@ -5036,7 +5060,7 @@
                       <a:r>
                         <a:rPr sz="1100">
                           <a:solidFill>
-                            <a:srgbClr val="1E293B"/>
+                            <a:srgbClr val="EEEEEE"/>
                           </a:solidFill>
                         </a:rPr>
                         <a:t>内定通知文</a:t>
@@ -5058,7 +5082,7 @@
                       <a:r>
                         <a:rPr sz="1100">
                           <a:solidFill>
-                            <a:srgbClr val="1E293B"/>
+                            <a:srgbClr val="EEEEEE"/>
                           </a:solidFill>
                         </a:rPr>
                         <a:t>内定のご連絡メール・書面のたたき台</a:t>
@@ -5082,7 +5106,7 @@
                       <a:r>
                         <a:rPr sz="1100">
                           <a:solidFill>
-                            <a:srgbClr val="1E293B"/>
+                            <a:srgbClr val="EEEEEE"/>
                           </a:solidFill>
                         </a:rPr>
                         <a:t>入社前案内文</a:t>
@@ -5100,7 +5124,7 @@
                       <a:r>
                         <a:rPr sz="1100">
                           <a:solidFill>
-                            <a:srgbClr val="1E293B"/>
+                            <a:srgbClr val="EEEEEE"/>
                           </a:solidFill>
                         </a:rPr>
                         <a:t>初日の持ち物・手続き・注意事項をまとめた案内文</a:t>
@@ -5128,7 +5152,7 @@
     <p:bg>
       <p:bgPr>
         <a:solidFill>
-          <a:srgbClr val="1E40AF"/>
+          <a:srgbClr val="1C1C1C"/>
         </a:solidFill>
         <a:effectLst/>
       </p:bgPr>
@@ -5246,7 +5270,7 @@
                   <a:srgbClr val="FFFFFF"/>
                 </a:solidFill>
               </a:rPr>
-              <a:t>ライブラリ化・保存</a:t>
+              <a:t>まとめ</a:t>
             </a:r>
           </a:p>
         </p:txBody>
@@ -5277,44 +5301,10 @@
             <a:r>
               <a:rPr sz="1400" b="0" i="0">
                 <a:solidFill>
-                  <a:srgbClr val="93C5FD"/>
+                  <a:srgbClr val="DA7756"/>
                 </a:solidFill>
               </a:rPr>
-              <a:t>[5分]</a:t>
-            </a:r>
-          </a:p>
-        </p:txBody>
-      </p:sp>
-      <p:sp>
-        <p:nvSpPr>
-          <p:cNvPr id="6" name="TextBox 5"/>
-          <p:cNvSpPr txBox="1"/>
-          <p:nvPr/>
-        </p:nvSpPr>
-        <p:spPr>
-          <a:xfrm>
-            <a:off x="2011680" y="2468880"/>
-            <a:ext cx="6858000" cy="914400"/>
-          </a:xfrm>
-          <a:prstGeom prst="rect">
-            <a:avLst/>
-          </a:prstGeom>
-          <a:noFill/>
-        </p:spPr>
-        <p:txBody>
-          <a:bodyPr wrap="square">
-            <a:spAutoFit/>
-          </a:bodyPr>
-          <a:lstStyle/>
-          <a:p>
-            <a:pPr algn="l"/>
-            <a:r>
-              <a:rPr sz="1500" b="0" i="0">
-                <a:solidFill>
-                  <a:srgbClr val="BFDBFE"/>
-                </a:solidFill>
-              </a:rPr>
-              <a:t>今日作ったプロンプトを「明日から使えるテンプレート」に仕上げる</a:t>
+              <a:t>[8分]</a:t>
             </a:r>
           </a:p>
         </p:txBody>
@@ -5330,6 +5320,14 @@
 <file path=ppt/slides/slide16.xml><?xml version="1.0" encoding="utf-8"?>
 <p:sld xmlns:a="http://schemas.openxmlformats.org/drawingml/2006/main" xmlns:p="http://schemas.openxmlformats.org/presentationml/2006/main" xmlns:r="http://schemas.openxmlformats.org/officeDocument/2006/relationships">
   <p:cSld>
+    <p:bg>
+      <p:bgPr>
+        <a:solidFill>
+          <a:srgbClr val="1C1C1C"/>
+        </a:solidFill>
+        <a:effectLst/>
+      </p:bgPr>
+    </p:bg>
     <p:spTree>
       <p:nvGrpSpPr>
         <p:cNvPr id="1" name=""/>
@@ -5352,7 +5350,7 @@
             <a:avLst/>
           </a:prstGeom>
           <a:solidFill>
-            <a:srgbClr val="1E40AF"/>
+            <a:srgbClr val="252525"/>
           </a:solidFill>
           <a:ln>
             <a:noFill/>
@@ -5409,358 +5407,27 @@
                   <a:srgbClr val="FFFFFF"/>
                 </a:solidFill>
               </a:rPr>
-              <a:t>プロンプトライブラリ化 — テンプレートに変換して保存</a:t>
-            </a:r>
-          </a:p>
-        </p:txBody>
-      </p:sp>
-      <p:sp>
-        <p:nvSpPr>
-          <p:cNvPr id="4" name="TextBox 3"/>
-          <p:cNvSpPr txBox="1"/>
-          <p:nvPr/>
-        </p:nvSpPr>
-        <p:spPr>
-          <a:xfrm>
-            <a:off x="7132320" y="91440"/>
-            <a:ext cx="1828800" cy="457200"/>
-          </a:xfrm>
-          <a:prstGeom prst="rect">
-            <a:avLst/>
-          </a:prstGeom>
-          <a:noFill/>
-        </p:spPr>
-        <p:txBody>
-          <a:bodyPr wrap="square">
-            <a:spAutoFit/>
-          </a:bodyPr>
-          <a:lstStyle/>
-          <a:p>
-            <a:pPr algn="r"/>
-            <a:r>
-              <a:rPr sz="1200" b="0" i="0">
-                <a:solidFill>
-                  <a:srgbClr val="93C5FD"/>
-                </a:solidFill>
-              </a:rPr>
-              <a:t>[5分]</a:t>
-            </a:r>
-          </a:p>
-        </p:txBody>
-      </p:sp>
-      <p:graphicFrame>
-        <p:nvGraphicFramePr>
-          <p:cNvPr id="5" name="Table 4"/>
-          <p:cNvGraphicFramePr>
-            <a:graphicFrameLocks noGrp="1"/>
-          </p:cNvGraphicFramePr>
-          <p:nvPr/>
-        </p:nvGraphicFramePr>
-        <p:xfrm>
-          <a:off x="457200" y="777240"/>
-          <a:ext cx="8229600" cy="2011680"/>
-        </p:xfrm>
-        <a:graphic>
-          <a:graphicData uri="http://schemas.openxmlformats.org/drawingml/2006/table">
-            <a:tbl>
-              <a:tblPr firstRow="1" bandRow="1">
-                <a:tableStyleId>{5C22544A-7EE6-4342-B048-85BDC9FD1C3A}</a:tableStyleId>
-              </a:tblPr>
-              <a:tblGrid>
-                <a:gridCol w="2057400"/>
-                <a:gridCol w="6172200"/>
-              </a:tblGrid>
-              <a:tr h="502920">
-                <a:tc>
-                  <a:txBody>
-                    <a:bodyPr wrap="square"/>
-                    <a:lstStyle/>
-                    <a:p>
-                      <a:pPr algn="ctr"/>
-                      <a:r>
-                        <a:rPr b="1" sz="1200">
-                          <a:solidFill>
-                            <a:srgbClr val="FFFFFF"/>
-                          </a:solidFill>
-                        </a:rPr>
-                        <a:t>Step</a:t>
-                      </a:r>
-                    </a:p>
-                  </a:txBody>
-                  <a:tcPr>
-                    <a:solidFill>
-                      <a:srgbClr val="1E40AF"/>
-                    </a:solidFill>
-                  </a:tcPr>
-                </a:tc>
-                <a:tc>
-                  <a:txBody>
-                    <a:bodyPr wrap="square"/>
-                    <a:lstStyle/>
-                    <a:p>
-                      <a:pPr algn="ctr"/>
-                      <a:r>
-                        <a:rPr b="1" sz="1200">
-                          <a:solidFill>
-                            <a:srgbClr val="FFFFFF"/>
-                          </a:solidFill>
-                        </a:rPr>
-                        <a:t>内容</a:t>
-                      </a:r>
-                    </a:p>
-                  </a:txBody>
-                  <a:tcPr>
-                    <a:solidFill>
-                      <a:srgbClr val="1E40AF"/>
-                    </a:solidFill>
-                  </a:tcPr>
-                </a:tc>
-              </a:tr>
-              <a:tr h="502920">
-                <a:tc>
-                  <a:txBody>
-                    <a:bodyPr wrap="square"/>
-                    <a:lstStyle/>
-                    <a:p>
-                      <a:pPr algn="l"/>
-                      <a:r>
-                        <a:rPr sz="1100">
-                          <a:solidFill>
-                            <a:srgbClr val="1E293B"/>
-                          </a:solidFill>
-                        </a:rPr>
-                        <a:t>1 振り返り</a:t>
-                      </a:r>
-                    </a:p>
-                  </a:txBody>
-                  <a:tcPr/>
-                </a:tc>
-                <a:tc>
-                  <a:txBody>
-                    <a:bodyPr wrap="square"/>
-                    <a:lstStyle/>
-                    <a:p>
-                      <a:pPr algn="l"/>
-                      <a:r>
-                        <a:rPr sz="1100">
-                          <a:solidFill>
-                            <a:srgbClr val="1E293B"/>
-                          </a:solidFill>
-                        </a:rPr>
-                        <a:t>セクション2〜4で作ったプロンプトを見直し・気に入った10本を確認</a:t>
-                      </a:r>
-                    </a:p>
-                  </a:txBody>
-                  <a:tcPr/>
-                </a:tc>
-              </a:tr>
-              <a:tr h="502920">
-                <a:tc>
-                  <a:txBody>
-                    <a:bodyPr wrap="square"/>
-                    <a:lstStyle/>
-                    <a:p>
-                      <a:pPr algn="l"/>
-                      <a:r>
-                        <a:rPr sz="1100">
-                          <a:solidFill>
-                            <a:srgbClr val="1E293B"/>
-                          </a:solidFill>
-                        </a:rPr>
-                        <a:t>2 テンプレート化</a:t>
-                      </a:r>
-                    </a:p>
-                  </a:txBody>
-                  <a:tcPr>
-                    <a:solidFill>
-                      <a:srgbClr val="F8FAFC"/>
-                    </a:solidFill>
-                  </a:tcPr>
-                </a:tc>
-                <a:tc>
-                  <a:txBody>
-                    <a:bodyPr wrap="square"/>
-                    <a:lstStyle/>
-                    <a:p>
-                      <a:pPr algn="l"/>
-                      <a:r>
-                        <a:rPr sz="1100">
-                          <a:solidFill>
-                            <a:srgbClr val="1E293B"/>
-                          </a:solidFill>
-                        </a:rPr>
-                        <a:t>固有情報を [ ] に置き換えて使い回せる形にする</a:t>
-                      </a:r>
-                    </a:p>
-                  </a:txBody>
-                  <a:tcPr>
-                    <a:solidFill>
-                      <a:srgbClr val="F8FAFC"/>
-                    </a:solidFill>
-                  </a:tcPr>
-                </a:tc>
-              </a:tr>
-              <a:tr h="502920">
-                <a:tc>
-                  <a:txBody>
-                    <a:bodyPr wrap="square"/>
-                    <a:lstStyle/>
-                    <a:p>
-                      <a:pPr algn="l"/>
-                      <a:r>
-                        <a:rPr sz="1100">
-                          <a:solidFill>
-                            <a:srgbClr val="1E293B"/>
-                          </a:solidFill>
-                        </a:rPr>
-                        <a:t>3 保存</a:t>
-                      </a:r>
-                    </a:p>
-                  </a:txBody>
-                  <a:tcPr/>
-                </a:tc>
-                <a:tc>
-                  <a:txBody>
-                    <a:bodyPr wrap="square"/>
-                    <a:lstStyle/>
-                    <a:p>
-                      <a:pPr algn="l"/>
-                      <a:r>
-                        <a:rPr sz="1100">
-                          <a:solidFill>
-                            <a:srgbClr val="1E293B"/>
-                          </a:solidFill>
-                        </a:rPr>
-                        <a:t>Googleドキュメント or メモアプリにコピーして持ち帰り</a:t>
-                      </a:r>
-                    </a:p>
-                  </a:txBody>
-                  <a:tcPr/>
-                </a:tc>
-              </a:tr>
-            </a:tbl>
-          </a:graphicData>
-        </a:graphic>
-      </p:graphicFrame>
-      <p:sp>
-        <p:nvSpPr>
-          <p:cNvPr id="6" name="TextBox 5"/>
-          <p:cNvSpPr txBox="1"/>
-          <p:nvPr/>
-        </p:nvSpPr>
-        <p:spPr>
-          <a:xfrm>
-            <a:off x="457200" y="2926080"/>
-            <a:ext cx="8229600" cy="365760"/>
-          </a:xfrm>
-          <a:prstGeom prst="rect">
-            <a:avLst/>
-          </a:prstGeom>
-          <a:noFill/>
-        </p:spPr>
-        <p:txBody>
-          <a:bodyPr wrap="square">
-            <a:spAutoFit/>
-          </a:bodyPr>
-          <a:lstStyle/>
-          <a:p>
-            <a:pPr algn="l"/>
-            <a:r>
-              <a:rPr sz="1300" b="1" i="0">
-                <a:solidFill>
-                  <a:srgbClr val="1E293B"/>
-                </a:solidFill>
-              </a:rPr>
-              <a:t>テンプレート化の例：</a:t>
-            </a:r>
-          </a:p>
-        </p:txBody>
-      </p:sp>
-      <p:sp>
-        <p:nvSpPr>
-          <p:cNvPr id="7" name="TextBox 6"/>
-          <p:cNvSpPr txBox="1"/>
-          <p:nvPr/>
-        </p:nvSpPr>
-        <p:spPr>
-          <a:xfrm>
-            <a:off x="457200" y="3337560"/>
-            <a:ext cx="8229600" cy="502920"/>
-          </a:xfrm>
-          <a:prstGeom prst="rect">
-            <a:avLst/>
-          </a:prstGeom>
-          <a:noFill/>
-        </p:spPr>
-        <p:txBody>
-          <a:bodyPr wrap="square">
-            <a:spAutoFit/>
-          </a:bodyPr>
-          <a:lstStyle/>
-          <a:p>
-            <a:r>
-              <a:rPr sz="1200">
-                <a:solidFill>
-                  <a:srgbClr val="64748B"/>
-                </a:solidFill>
-              </a:rPr>
-              <a:t>変換前：「広島県の製造業・従業員30名の会社で未経験歓迎の溶接工を募集」</a:t>
-            </a:r>
-          </a:p>
-          <a:p>
-            <a:r>
-              <a:rPr sz="1300" b="1" i="0">
-                <a:solidFill>
-                  <a:srgbClr val="059669"/>
-                </a:solidFill>
-              </a:rPr>
-              <a:t>変換後：「[都道府県]の[業種]・従業員[人数]名の会社で[条件]の[職種]を募集」</a:t>
-            </a:r>
-          </a:p>
-        </p:txBody>
-      </p:sp>
-    </p:spTree>
-  </p:cSld>
-  <p:clrMapOvr>
-    <a:masterClrMapping/>
-  </p:clrMapOvr>
-</p:sld>
-</file>
-
-<file path=ppt/slides/slide17.xml><?xml version="1.0" encoding="utf-8"?>
-<p:sld xmlns:a="http://schemas.openxmlformats.org/drawingml/2006/main" xmlns:p="http://schemas.openxmlformats.org/presentationml/2006/main" xmlns:r="http://schemas.openxmlformats.org/officeDocument/2006/relationships">
-  <p:cSld>
-    <p:bg>
-      <p:bgPr>
-        <a:solidFill>
-          <a:srgbClr val="1E40AF"/>
-        </a:solidFill>
-        <a:effectLst/>
-      </p:bgPr>
-    </p:bg>
-    <p:spTree>
-      <p:nvGrpSpPr>
-        <p:cNvPr id="1" name=""/>
-        <p:cNvGrpSpPr/>
-        <p:nvPr/>
-      </p:nvGrpSpPr>
-      <p:grpSpPr/>
-      <p:sp>
-        <p:nvSpPr>
-          <p:cNvPr id="2" name="Rectangle 1"/>
+              <a:t>まとめ</a:t>
+            </a:r>
+          </a:p>
+        </p:txBody>
+      </p:sp>
+      <p:sp>
+        <p:nvSpPr>
+          <p:cNvPr id="4" name="Rectangle 3"/>
           <p:cNvSpPr/>
           <p:nvPr/>
         </p:nvSpPr>
         <p:spPr>
           <a:xfrm>
-            <a:off x="548640" y="822960"/>
-            <a:ext cx="1097280" cy="1097280"/>
+            <a:off x="457200" y="777240"/>
+            <a:ext cx="8229600" cy="1600200"/>
           </a:xfrm>
           <a:prstGeom prst="rect">
             <a:avLst/>
           </a:prstGeom>
           <a:solidFill>
-            <a:srgbClr val="DA7756"/>
+            <a:srgbClr val="2F2F2F"/>
           </a:solidFill>
           <a:ln>
             <a:noFill/>
@@ -5790,14 +5457,14 @@
       </p:sp>
       <p:sp>
         <p:nvSpPr>
-          <p:cNvPr id="3" name="TextBox 2"/>
+          <p:cNvPr id="5" name="TextBox 4"/>
           <p:cNvSpPr txBox="1"/>
           <p:nvPr/>
         </p:nvSpPr>
         <p:spPr>
           <a:xfrm>
-            <a:off x="548640" y="868680"/>
-            <a:ext cx="1097280" cy="1005840"/>
+            <a:off x="640080" y="868680"/>
+            <a:ext cx="7772400" cy="411480"/>
           </a:xfrm>
           <a:prstGeom prst="rect">
             <a:avLst/>
@@ -5810,28 +5477,57 @@
           </a:bodyPr>
           <a:lstStyle/>
           <a:p>
-            <a:pPr algn="ctr"/>
-            <a:r>
-              <a:rPr sz="3800" b="1" i="0">
+            <a:r>
+              <a:rPr sz="1300" b="1" i="0">
                 <a:solidFill>
-                  <a:srgbClr val="FFFFFF"/>
+                  <a:srgbClr val="1C1C1C"/>
                 </a:solidFill>
               </a:rPr>
-              <a:t>5</a:t>
-            </a:r>
-          </a:p>
-        </p:txBody>
-      </p:sp>
-      <p:sp>
-        <p:nvSpPr>
-          <p:cNvPr id="4" name="TextBox 3"/>
+              <a:t>今日の3方向まとめ</a:t>
+            </a:r>
+          </a:p>
+          <a:p>
+            <a:r>
+              <a:rPr sz="1300" b="1" i="0">
+                <a:solidFill>
+                  <a:srgbClr val="1C1C1C"/>
+                </a:solidFill>
+              </a:rPr>
+              <a:t>① 文書生成（議事録・メール・SNS投稿）</a:t>
+            </a:r>
+          </a:p>
+          <a:p>
+            <a:r>
+              <a:rPr sz="1300" b="1" i="0">
+                <a:solidFill>
+                  <a:srgbClr val="1C1C1C"/>
+                </a:solidFill>
+              </a:rPr>
+              <a:t>② 文書→表（議事録→タスク表・アンケート→集計表）</a:t>
+            </a:r>
+          </a:p>
+          <a:p>
+            <a:r>
+              <a:rPr sz="1300" b="1" i="0">
+                <a:solidFill>
+                  <a:srgbClr val="1C1C1C"/>
+                </a:solidFill>
+              </a:rPr>
+              <a:t>③ 表→文書（商品リスト・顧客リスト→一括生成）</a:t>
+            </a:r>
+          </a:p>
+        </p:txBody>
+      </p:sp>
+      <p:sp>
+        <p:nvSpPr>
+          <p:cNvPr id="6" name="TextBox 5"/>
           <p:cNvSpPr txBox="1"/>
           <p:nvPr/>
         </p:nvSpPr>
         <p:spPr>
           <a:xfrm>
-            <a:off x="2011680" y="960120"/>
-            <a:ext cx="6858000" cy="914400"/>
+            <a:off x="640080" y="1298448"/>
+            <a:ext cx="7772400" cy="914400"/>
           </a:xfrm>
           <a:prstGeom prst="rect">
             <a:avLst/>
@@ -5844,279 +5540,10 @@
           </a:bodyPr>
           <a:lstStyle/>
           <a:p>
-            <a:pPr algn="l"/>
-            <a:r>
-              <a:rPr sz="3000" b="1" i="0">
-                <a:solidFill>
-                  <a:srgbClr val="FFFFFF"/>
-                </a:solidFill>
-              </a:rPr>
-              <a:t>まとめ</a:t>
-            </a:r>
-          </a:p>
-        </p:txBody>
-      </p:sp>
-      <p:sp>
-        <p:nvSpPr>
-          <p:cNvPr id="5" name="TextBox 4"/>
-          <p:cNvSpPr txBox="1"/>
-          <p:nvPr/>
-        </p:nvSpPr>
-        <p:spPr>
-          <a:xfrm>
-            <a:off x="2011680" y="1920240"/>
-            <a:ext cx="4572000" cy="457200"/>
-          </a:xfrm>
-          <a:prstGeom prst="rect">
-            <a:avLst/>
-          </a:prstGeom>
-          <a:noFill/>
-        </p:spPr>
-        <p:txBody>
-          <a:bodyPr wrap="square">
-            <a:spAutoFit/>
-          </a:bodyPr>
-          <a:lstStyle/>
-          <a:p>
-            <a:pPr algn="l"/>
-            <a:r>
-              <a:rPr sz="1400" b="0" i="0">
-                <a:solidFill>
-                  <a:srgbClr val="93C5FD"/>
-                </a:solidFill>
-              </a:rPr>
-              <a:t>[8分]</a:t>
-            </a:r>
-          </a:p>
-        </p:txBody>
-      </p:sp>
-    </p:spTree>
-  </p:cSld>
-  <p:clrMapOvr>
-    <a:masterClrMapping/>
-  </p:clrMapOvr>
-</p:sld>
-</file>
-
-<file path=ppt/slides/slide18.xml><?xml version="1.0" encoding="utf-8"?>
-<p:sld xmlns:a="http://schemas.openxmlformats.org/drawingml/2006/main" xmlns:p="http://schemas.openxmlformats.org/presentationml/2006/main" xmlns:r="http://schemas.openxmlformats.org/officeDocument/2006/relationships">
-  <p:cSld>
-    <p:spTree>
-      <p:nvGrpSpPr>
-        <p:cNvPr id="1" name=""/>
-        <p:cNvGrpSpPr/>
-        <p:nvPr/>
-      </p:nvGrpSpPr>
-      <p:grpSpPr/>
-      <p:sp>
-        <p:nvSpPr>
-          <p:cNvPr id="2" name="Rectangle 1"/>
-          <p:cNvSpPr/>
-          <p:nvPr/>
-        </p:nvSpPr>
-        <p:spPr>
-          <a:xfrm>
-            <a:off x="0" y="0"/>
-            <a:ext cx="9144000" cy="594360"/>
-          </a:xfrm>
-          <a:prstGeom prst="rect">
-            <a:avLst/>
-          </a:prstGeom>
-          <a:solidFill>
-            <a:srgbClr val="1E40AF"/>
-          </a:solidFill>
-          <a:ln>
-            <a:noFill/>
-          </a:ln>
-        </p:spPr>
-        <p:style>
-          <a:lnRef idx="1">
-            <a:schemeClr val="accent1"/>
-          </a:lnRef>
-          <a:fillRef idx="3">
-            <a:schemeClr val="accent1"/>
-          </a:fillRef>
-          <a:effectRef idx="2">
-            <a:schemeClr val="accent1"/>
-          </a:effectRef>
-          <a:fontRef idx="minor">
-            <a:schemeClr val="lt1"/>
-          </a:fontRef>
-        </p:style>
-        <p:txBody>
-          <a:bodyPr rtlCol="0" anchor="ctr"/>
-          <a:lstStyle/>
-          <a:p>
-            <a:pPr algn="ctr"/>
-          </a:p>
-        </p:txBody>
-      </p:sp>
-      <p:sp>
-        <p:nvSpPr>
-          <p:cNvPr id="3" name="TextBox 2"/>
-          <p:cNvSpPr txBox="1"/>
-          <p:nvPr/>
-        </p:nvSpPr>
-        <p:spPr>
-          <a:xfrm>
-            <a:off x="274320" y="64008"/>
-            <a:ext cx="7772400" cy="502920"/>
-          </a:xfrm>
-          <a:prstGeom prst="rect">
-            <a:avLst/>
-          </a:prstGeom>
-          <a:noFill/>
-        </p:spPr>
-        <p:txBody>
-          <a:bodyPr wrap="square">
-            <a:spAutoFit/>
-          </a:bodyPr>
-          <a:lstStyle/>
-          <a:p>
-            <a:pPr algn="l"/>
-            <a:r>
-              <a:rPr sz="1800" b="1" i="0">
-                <a:solidFill>
-                  <a:srgbClr val="FFFFFF"/>
-                </a:solidFill>
-              </a:rPr>
-              <a:t>まとめ</a:t>
-            </a:r>
-          </a:p>
-        </p:txBody>
-      </p:sp>
-      <p:sp>
-        <p:nvSpPr>
-          <p:cNvPr id="4" name="Rectangle 3"/>
-          <p:cNvSpPr/>
-          <p:nvPr/>
-        </p:nvSpPr>
-        <p:spPr>
-          <a:xfrm>
-            <a:off x="457200" y="777240"/>
-            <a:ext cx="8229600" cy="1600200"/>
-          </a:xfrm>
-          <a:prstGeom prst="rect">
-            <a:avLst/>
-          </a:prstGeom>
-          <a:solidFill>
-            <a:srgbClr val="EFF6FF"/>
-          </a:solidFill>
-          <a:ln>
-            <a:noFill/>
-          </a:ln>
-        </p:spPr>
-        <p:style>
-          <a:lnRef idx="1">
-            <a:schemeClr val="accent1"/>
-          </a:lnRef>
-          <a:fillRef idx="3">
-            <a:schemeClr val="accent1"/>
-          </a:fillRef>
-          <a:effectRef idx="2">
-            <a:schemeClr val="accent1"/>
-          </a:effectRef>
-          <a:fontRef idx="minor">
-            <a:schemeClr val="lt1"/>
-          </a:fontRef>
-        </p:style>
-        <p:txBody>
-          <a:bodyPr rtlCol="0" anchor="ctr"/>
-          <a:lstStyle/>
-          <a:p>
-            <a:pPr algn="ctr"/>
-          </a:p>
-        </p:txBody>
-      </p:sp>
-      <p:sp>
-        <p:nvSpPr>
-          <p:cNvPr id="5" name="TextBox 4"/>
-          <p:cNvSpPr txBox="1"/>
-          <p:nvPr/>
-        </p:nvSpPr>
-        <p:spPr>
-          <a:xfrm>
-            <a:off x="640080" y="868680"/>
-            <a:ext cx="7772400" cy="411480"/>
-          </a:xfrm>
-          <a:prstGeom prst="rect">
-            <a:avLst/>
-          </a:prstGeom>
-          <a:noFill/>
-        </p:spPr>
-        <p:txBody>
-          <a:bodyPr wrap="square">
-            <a:spAutoFit/>
-          </a:bodyPr>
-          <a:lstStyle/>
-          <a:p>
-            <a:r>
-              <a:rPr sz="1300" b="1" i="0">
-                <a:solidFill>
-                  <a:srgbClr val="1E40AF"/>
-                </a:solidFill>
-              </a:rPr>
-              <a:t>今日の3方向まとめ</a:t>
-            </a:r>
-          </a:p>
-          <a:p>
-            <a:r>
-              <a:rPr sz="1300" b="1" i="0">
-                <a:solidFill>
-                  <a:srgbClr val="1E40AF"/>
-                </a:solidFill>
-              </a:rPr>
-              <a:t>① 文書生成（議事録・メール・SNS投稿）</a:t>
-            </a:r>
-          </a:p>
-          <a:p>
-            <a:r>
-              <a:rPr sz="1300" b="1" i="0">
-                <a:solidFill>
-                  <a:srgbClr val="1E40AF"/>
-                </a:solidFill>
-              </a:rPr>
-              <a:t>② 文書→表（議事録→タスク表・アンケート→集計表）</a:t>
-            </a:r>
-          </a:p>
-          <a:p>
-            <a:r>
-              <a:rPr sz="1300" b="1" i="0">
-                <a:solidFill>
-                  <a:srgbClr val="1E40AF"/>
-                </a:solidFill>
-              </a:rPr>
-              <a:t>③ 表→文書（商品リスト・顧客リスト→一括生成）</a:t>
-            </a:r>
-          </a:p>
-        </p:txBody>
-      </p:sp>
-      <p:sp>
-        <p:nvSpPr>
-          <p:cNvPr id="6" name="TextBox 5"/>
-          <p:cNvSpPr txBox="1"/>
-          <p:nvPr/>
-        </p:nvSpPr>
-        <p:spPr>
-          <a:xfrm>
-            <a:off x="640080" y="1298448"/>
-            <a:ext cx="7772400" cy="914400"/>
-          </a:xfrm>
-          <a:prstGeom prst="rect">
-            <a:avLst/>
-          </a:prstGeom>
-          <a:noFill/>
-        </p:spPr>
-        <p:txBody>
-          <a:bodyPr wrap="square">
-            <a:spAutoFit/>
-          </a:bodyPr>
-          <a:lstStyle/>
-          <a:p>
             <a:r>
               <a:rPr sz="1200">
                 <a:solidFill>
-                  <a:srgbClr val="1E293B"/>
+                  <a:srgbClr val="EEEEEE"/>
                 </a:solidFill>
               </a:rPr>
               <a:t>スライドのプロンプト例は [ ] を書き換えるだけで使えます。明日から試してみてください</a:t>
@@ -6203,6 +5630,14 @@
 <file path=ppt/slides/slide2.xml><?xml version="1.0" encoding="utf-8"?>
 <p:sld xmlns:a="http://schemas.openxmlformats.org/drawingml/2006/main" xmlns:p="http://schemas.openxmlformats.org/presentationml/2006/main" xmlns:r="http://schemas.openxmlformats.org/officeDocument/2006/relationships">
   <p:cSld>
+    <p:bg>
+      <p:bgPr>
+        <a:solidFill>
+          <a:srgbClr val="1C1C1C"/>
+        </a:solidFill>
+        <a:effectLst/>
+      </p:bgPr>
+    </p:bg>
     <p:spTree>
       <p:nvGrpSpPr>
         <p:cNvPr id="1" name=""/>
@@ -6225,7 +5660,7 @@
             <a:avLst/>
           </a:prstGeom>
           <a:solidFill>
-            <a:srgbClr val="1E40AF"/>
+            <a:srgbClr val="252525"/>
           </a:solidFill>
           <a:ln>
             <a:noFill/>
@@ -6329,7 +5764,7 @@
                   </a:txBody>
                   <a:tcPr>
                     <a:solidFill>
-                      <a:srgbClr val="1E40AF"/>
+                      <a:srgbClr val="1C1C1C"/>
                     </a:solidFill>
                   </a:tcPr>
                 </a:tc>
@@ -6351,7 +5786,7 @@
                   </a:txBody>
                   <a:tcPr>
                     <a:solidFill>
-                      <a:srgbClr val="1E40AF"/>
+                      <a:srgbClr val="1C1C1C"/>
                     </a:solidFill>
                   </a:tcPr>
                 </a:tc>
@@ -6373,7 +5808,7 @@
                   </a:txBody>
                   <a:tcPr>
                     <a:solidFill>
-                      <a:srgbClr val="1E40AF"/>
+                      <a:srgbClr val="1C1C1C"/>
                     </a:solidFill>
                   </a:tcPr>
                 </a:tc>
@@ -6388,7 +5823,7 @@
                       <a:r>
                         <a:rPr sz="1100">
                           <a:solidFill>
-                            <a:srgbClr val="1E293B"/>
+                            <a:srgbClr val="EEEEEE"/>
                           </a:solidFill>
                         </a:rPr>
                         <a:t>1</a:t>
@@ -6406,7 +5841,7 @@
                       <a:r>
                         <a:rPr sz="1100">
                           <a:solidFill>
-                            <a:srgbClr val="1E293B"/>
+                            <a:srgbClr val="EEEEEE"/>
                           </a:solidFill>
                         </a:rPr>
                         <a:t>イントロ</a:t>
@@ -6424,7 +5859,7 @@
                       <a:r>
                         <a:rPr sz="1100">
                           <a:solidFill>
-                            <a:srgbClr val="1E293B"/>
+                            <a:srgbClr val="EEEEEE"/>
                           </a:solidFill>
                         </a:rPr>
                         <a:t>10分</a:t>
@@ -6444,7 +5879,7 @@
                       <a:r>
                         <a:rPr sz="1100">
                           <a:solidFill>
-                            <a:srgbClr val="1E293B"/>
+                            <a:srgbClr val="EEEEEE"/>
                           </a:solidFill>
                         </a:rPr>
                         <a:t>2</a:t>
@@ -6466,7 +5901,7 @@
                       <a:r>
                         <a:rPr sz="1100">
                           <a:solidFill>
-                            <a:srgbClr val="1E293B"/>
+                            <a:srgbClr val="EEEEEE"/>
                           </a:solidFill>
                         </a:rPr>
                         <a:t>社内文書（議事録・メール・報告書）</a:t>
@@ -6488,7 +5923,7 @@
                       <a:r>
                         <a:rPr sz="1100">
                           <a:solidFill>
-                            <a:srgbClr val="1E293B"/>
+                            <a:srgbClr val="EEEEEE"/>
                           </a:solidFill>
                         </a:rPr>
                         <a:t>30分</a:t>
@@ -6512,7 +5947,7 @@
                       <a:r>
                         <a:rPr sz="1100">
                           <a:solidFill>
-                            <a:srgbClr val="1E293B"/>
+                            <a:srgbClr val="EEEEEE"/>
                           </a:solidFill>
                         </a:rPr>
                         <a:t>3</a:t>
@@ -6530,7 +5965,7 @@
                       <a:r>
                         <a:rPr sz="1100">
                           <a:solidFill>
-                            <a:srgbClr val="1E293B"/>
+                            <a:srgbClr val="EEEEEE"/>
                           </a:solidFill>
                         </a:rPr>
                         <a:t>広報・発信文書（SNS・チラシ・HP）</a:t>
@@ -6548,7 +5983,7 @@
                       <a:r>
                         <a:rPr sz="1100">
                           <a:solidFill>
-                            <a:srgbClr val="1E293B"/>
+                            <a:srgbClr val="EEEEEE"/>
                           </a:solidFill>
                         </a:rPr>
                         <a:t>30分</a:t>
@@ -6568,7 +6003,7 @@
                       <a:r>
                         <a:rPr sz="1100">
                           <a:solidFill>
-                            <a:srgbClr val="1E293B"/>
+                            <a:srgbClr val="EEEEEE"/>
                           </a:solidFill>
                         </a:rPr>
                         <a:t>—</a:t>
@@ -6590,7 +6025,7 @@
                       <a:r>
                         <a:rPr sz="1100">
                           <a:solidFill>
-                            <a:srgbClr val="1E293B"/>
+                            <a:srgbClr val="EEEEEE"/>
                           </a:solidFill>
                         </a:rPr>
                         <a:t>休憩</a:t>
@@ -6612,7 +6047,7 @@
                       <a:r>
                         <a:rPr sz="1100">
                           <a:solidFill>
-                            <a:srgbClr val="1E293B"/>
+                            <a:srgbClr val="EEEEEE"/>
                           </a:solidFill>
                         </a:rPr>
                         <a:t>10分</a:t>
@@ -6636,7 +6071,7 @@
                       <a:r>
                         <a:rPr sz="1100">
                           <a:solidFill>
-                            <a:srgbClr val="1E293B"/>
+                            <a:srgbClr val="EEEEEE"/>
                           </a:solidFill>
                         </a:rPr>
                         <a:t>4</a:t>
@@ -6654,7 +6089,7 @@
                       <a:r>
                         <a:rPr sz="1100">
                           <a:solidFill>
-                            <a:srgbClr val="1E293B"/>
+                            <a:srgbClr val="EEEEEE"/>
                           </a:solidFill>
                         </a:rPr>
                         <a:t>採用広報（求人票・会社紹介文）</a:t>
@@ -6672,7 +6107,7 @@
                       <a:r>
                         <a:rPr sz="1100">
                           <a:solidFill>
-                            <a:srgbClr val="1E293B"/>
+                            <a:srgbClr val="EEEEEE"/>
                           </a:solidFill>
                         </a:rPr>
                         <a:t>30分</a:t>
@@ -6692,7 +6127,7 @@
                       <a:r>
                         <a:rPr sz="1100">
                           <a:solidFill>
-                            <a:srgbClr val="1E293B"/>
+                            <a:srgbClr val="EEEEEE"/>
                           </a:solidFill>
                         </a:rPr>
                         <a:t>5</a:t>
@@ -6714,7 +6149,7 @@
                       <a:r>
                         <a:rPr sz="1100">
                           <a:solidFill>
-                            <a:srgbClr val="1E293B"/>
+                            <a:srgbClr val="EEEEEE"/>
                           </a:solidFill>
                         </a:rPr>
                         <a:t>ライブラリ化・保存</a:t>
@@ -6736,7 +6171,7 @@
                       <a:r>
                         <a:rPr sz="1100">
                           <a:solidFill>
-                            <a:srgbClr val="1E293B"/>
+                            <a:srgbClr val="EEEEEE"/>
                           </a:solidFill>
                         </a:rPr>
                         <a:t>5分</a:t>
@@ -6760,7 +6195,7 @@
                       <a:r>
                         <a:rPr sz="1100">
                           <a:solidFill>
-                            <a:srgbClr val="1E293B"/>
+                            <a:srgbClr val="EEEEEE"/>
                           </a:solidFill>
                         </a:rPr>
                         <a:t>6</a:t>
@@ -6778,7 +6213,7 @@
                       <a:r>
                         <a:rPr sz="1100">
                           <a:solidFill>
-                            <a:srgbClr val="1E293B"/>
+                            <a:srgbClr val="EEEEEE"/>
                           </a:solidFill>
                         </a:rPr>
                         <a:t>まとめ</a:t>
@@ -6796,7 +6231,7 @@
                       <a:r>
                         <a:rPr sz="1100">
                           <a:solidFill>
-                            <a:srgbClr val="1E293B"/>
+                            <a:srgbClr val="EEEEEE"/>
                           </a:solidFill>
                         </a:rPr>
                         <a:t>5分</a:t>
@@ -6824,7 +6259,7 @@
     <p:bg>
       <p:bgPr>
         <a:solidFill>
-          <a:srgbClr val="1E40AF"/>
+          <a:srgbClr val="1C1C1C"/>
         </a:solidFill>
         <a:effectLst/>
       </p:bgPr>
@@ -6973,7 +6408,7 @@
             <a:r>
               <a:rPr sz="1400" b="0" i="0">
                 <a:solidFill>
-                  <a:srgbClr val="93C5FD"/>
+                  <a:srgbClr val="DA7756"/>
                 </a:solidFill>
               </a:rPr>
               <a:t>[10分]</a:t>
@@ -7007,7 +6442,7 @@
             <a:r>
               <a:rPr sz="1500" b="0" i="0">
                 <a:solidFill>
-                  <a:srgbClr val="BFDBFE"/>
+                  <a:srgbClr val="B8A99A"/>
                 </a:solidFill>
               </a:rPr>
               <a:t>Gemini確認 ＆ 今日のゴール説明</a:t>
@@ -7026,6 +6461,14 @@
 <file path=ppt/slides/slide4.xml><?xml version="1.0" encoding="utf-8"?>
 <p:sld xmlns:a="http://schemas.openxmlformats.org/drawingml/2006/main" xmlns:p="http://schemas.openxmlformats.org/presentationml/2006/main" xmlns:r="http://schemas.openxmlformats.org/officeDocument/2006/relationships">
   <p:cSld>
+    <p:bg>
+      <p:bgPr>
+        <a:solidFill>
+          <a:srgbClr val="1C1C1C"/>
+        </a:solidFill>
+        <a:effectLst/>
+      </p:bgPr>
+    </p:bg>
     <p:spTree>
       <p:nvGrpSpPr>
         <p:cNvPr id="1" name=""/>
@@ -7048,7 +6491,7 @@
             <a:avLst/>
           </a:prstGeom>
           <a:solidFill>
-            <a:srgbClr val="1E40AF"/>
+            <a:srgbClr val="252525"/>
           </a:solidFill>
           <a:ln>
             <a:noFill/>
@@ -7136,7 +6579,7 @@
             <a:r>
               <a:rPr sz="1200" b="0" i="0">
                 <a:solidFill>
-                  <a:srgbClr val="93C5FD"/>
+                  <a:srgbClr val="DA7756"/>
                 </a:solidFill>
               </a:rPr>
               <a:t>[10分]</a:t>
@@ -7185,7 +6628,7 @@
                   </a:txBody>
                   <a:tcPr>
                     <a:solidFill>
-                      <a:srgbClr val="1E40AF"/>
+                      <a:srgbClr val="1C1C1C"/>
                     </a:solidFill>
                   </a:tcPr>
                 </a:tc>
@@ -7207,7 +6650,7 @@
                   </a:txBody>
                   <a:tcPr>
                     <a:solidFill>
-                      <a:srgbClr val="1E40AF"/>
+                      <a:srgbClr val="1C1C1C"/>
                     </a:solidFill>
                   </a:tcPr>
                 </a:tc>
@@ -7222,7 +6665,7 @@
                       <a:r>
                         <a:rPr sz="1100">
                           <a:solidFill>
-                            <a:srgbClr val="1E293B"/>
+                            <a:srgbClr val="EEEEEE"/>
                           </a:solidFill>
                         </a:rPr>
                         <a:t>Geminiログイン</a:t>
@@ -7240,7 +6683,7 @@
                       <a:r>
                         <a:rPr sz="1100">
                           <a:solidFill>
-                            <a:srgbClr val="1E293B"/>
+                            <a:srgbClr val="EEEEEE"/>
                           </a:solidFill>
                         </a:rPr>
                         <a:t>Googleアカウントでgemini.google.comへアクセス（未作成の人はその場で作成）</a:t>
@@ -7260,7 +6703,7 @@
                       <a:r>
                         <a:rPr sz="1100">
                           <a:solidFill>
-                            <a:srgbClr val="1E293B"/>
+                            <a:srgbClr val="EEEEEE"/>
                           </a:solidFill>
                         </a:rPr>
                         <a:t>コース①未受講の方</a:t>
@@ -7282,7 +6725,7 @@
                       <a:r>
                         <a:rPr sz="1100">
                           <a:solidFill>
-                            <a:srgbClr val="1E293B"/>
+                            <a:srgbClr val="EEEEEE"/>
                           </a:solidFill>
                         </a:rPr>
                         <a:t>プロンプト4要素を3分でおさらい → 「役割・背景・指示・形式」</a:t>
@@ -7306,7 +6749,7 @@
                       <a:r>
                         <a:rPr sz="1100">
                           <a:solidFill>
-                            <a:srgbClr val="1E293B"/>
+                            <a:srgbClr val="EEEEEE"/>
                           </a:solidFill>
                         </a:rPr>
                         <a:t>今日のゴール</a:t>
@@ -7324,7 +6767,7 @@
                       <a:r>
                         <a:rPr sz="1100">
                           <a:solidFill>
-                            <a:srgbClr val="1E293B"/>
+                            <a:srgbClr val="EEEEEE"/>
                           </a:solidFill>
                         </a:rPr>
                         <a:t>文書系3カテゴリ（社内・広報・採用）でプロンプトを作り、10本ライブラリ化して持ち帰る</a:t>
@@ -7353,7 +6796,7 @@
             <a:avLst/>
           </a:prstGeom>
           <a:solidFill>
-            <a:srgbClr val="EFF6FF"/>
+            <a:srgbClr val="2F2F2F"/>
           </a:solidFill>
           <a:ln>
             <a:noFill/>
@@ -7406,7 +6849,7 @@
             <a:r>
               <a:rPr sz="1300" b="0" i="0">
                 <a:solidFill>
-                  <a:srgbClr val="1E293B"/>
+                  <a:srgbClr val="EEEEEE"/>
                 </a:solidFill>
               </a:rPr>
               <a:t>ゴール：実践でプロンプトの感覚をつかむ。スライドのプロンプト例は [ ] を書き換えるだけで使えます</a:t>
@@ -7428,7 +6871,7 @@
     <p:bg>
       <p:bgPr>
         <a:solidFill>
-          <a:srgbClr val="1E40AF"/>
+          <a:srgbClr val="1C1C1C"/>
         </a:solidFill>
         <a:effectLst/>
       </p:bgPr>
@@ -7577,7 +7020,7 @@
             <a:r>
               <a:rPr sz="1400" b="0" i="0">
                 <a:solidFill>
-                  <a:srgbClr val="93C5FD"/>
+                  <a:srgbClr val="DA7756"/>
                 </a:solidFill>
               </a:rPr>
               <a:t>[30分]</a:t>
@@ -7611,7 +7054,7 @@
             <a:r>
               <a:rPr sz="1500" b="0" i="0">
                 <a:solidFill>
-                  <a:srgbClr val="BFDBFE"/>
+                  <a:srgbClr val="B8A99A"/>
                 </a:solidFill>
               </a:rPr>
               <a:t>議事録・メール・報告書・マニュアルを作る</a:t>
@@ -7630,6 +7073,14 @@
 <file path=ppt/slides/slide6.xml><?xml version="1.0" encoding="utf-8"?>
 <p:sld xmlns:a="http://schemas.openxmlformats.org/drawingml/2006/main" xmlns:p="http://schemas.openxmlformats.org/presentationml/2006/main" xmlns:r="http://schemas.openxmlformats.org/officeDocument/2006/relationships">
   <p:cSld>
+    <p:bg>
+      <p:bgPr>
+        <a:solidFill>
+          <a:srgbClr val="1C1C1C"/>
+        </a:solidFill>
+        <a:effectLst/>
+      </p:bgPr>
+    </p:bg>
     <p:spTree>
       <p:nvGrpSpPr>
         <p:cNvPr id="1" name=""/>
@@ -7652,7 +7103,7 @@
             <a:avLst/>
           </a:prstGeom>
           <a:solidFill>
-            <a:srgbClr val="1E40AF"/>
+            <a:srgbClr val="252525"/>
           </a:solidFill>
           <a:ln>
             <a:noFill/>
@@ -7740,7 +7191,7 @@
             <a:r>
               <a:rPr sz="1200" b="0" i="0">
                 <a:solidFill>
-                  <a:srgbClr val="93C5FD"/>
+                  <a:srgbClr val="DA7756"/>
                 </a:solidFill>
               </a:rPr>
               <a:t>[実践15分]</a:t>
@@ -7763,7 +7214,7 @@
             <a:avLst/>
           </a:prstGeom>
           <a:solidFill>
-            <a:srgbClr val="EFF6FF"/>
+            <a:srgbClr val="2F2F2F"/>
           </a:solidFill>
           <a:ln>
             <a:noFill/>
@@ -7817,7 +7268,7 @@
             <a:r>
               <a:rPr sz="1400" b="1" i="0">
                 <a:solidFill>
-                  <a:srgbClr val="1E293B"/>
+                  <a:srgbClr val="EEEEEE"/>
                 </a:solidFill>
               </a:rPr>
               <a:t>お題：「先週の会議の発言メモを渡すから議事録に整形して」</a:t>
@@ -7867,7 +7318,7 @@
                   </a:txBody>
                   <a:tcPr>
                     <a:solidFill>
-                      <a:srgbClr val="1E40AF"/>
+                      <a:srgbClr val="1C1C1C"/>
                     </a:solidFill>
                   </a:tcPr>
                 </a:tc>
@@ -7889,7 +7340,7 @@
                   </a:txBody>
                   <a:tcPr>
                     <a:solidFill>
-                      <a:srgbClr val="1E40AF"/>
+                      <a:srgbClr val="1C1C1C"/>
                     </a:solidFill>
                   </a:tcPr>
                 </a:tc>
@@ -7911,7 +7362,7 @@
                   </a:txBody>
                   <a:tcPr>
                     <a:solidFill>
-                      <a:srgbClr val="1E40AF"/>
+                      <a:srgbClr val="1C1C1C"/>
                     </a:solidFill>
                   </a:tcPr>
                 </a:tc>
@@ -7926,7 +7377,7 @@
                       <a:r>
                         <a:rPr sz="1100">
                           <a:solidFill>
-                            <a:srgbClr val="1E293B"/>
+                            <a:srgbClr val="EEEEEE"/>
                           </a:solidFill>
                         </a:rPr>
                         <a:t>1</a:t>
@@ -7944,7 +7395,7 @@
                       <a:r>
                         <a:rPr sz="1100">
                           <a:solidFill>
-                            <a:srgbClr val="1E293B"/>
+                            <a:srgbClr val="EEEEEE"/>
                           </a:solidFill>
                         </a:rPr>
                         <a:t>発言メモを手元に準備（なければ架空で可）</a:t>
@@ -7962,7 +7413,7 @@
                       <a:r>
                         <a:rPr sz="1100">
                           <a:solidFill>
-                            <a:srgbClr val="1E293B"/>
+                            <a:srgbClr val="EEEEEE"/>
                           </a:solidFill>
                         </a:rPr>
                         <a:t>2分</a:t>
@@ -7982,7 +7433,7 @@
                       <a:r>
                         <a:rPr sz="1100">
                           <a:solidFill>
-                            <a:srgbClr val="1E293B"/>
+                            <a:srgbClr val="EEEEEE"/>
                           </a:solidFill>
                         </a:rPr>
                         <a:t>2</a:t>
@@ -8004,7 +7455,7 @@
                       <a:r>
                         <a:rPr sz="1100">
                           <a:solidFill>
-                            <a:srgbClr val="1E293B"/>
+                            <a:srgbClr val="EEEEEE"/>
                           </a:solidFill>
                         </a:rPr>
                         <a:t>ひな型を使ってプロンプトを入力 → 送信</a:t>
@@ -8026,7 +7477,7 @@
                       <a:r>
                         <a:rPr sz="1100">
                           <a:solidFill>
-                            <a:srgbClr val="1E293B"/>
+                            <a:srgbClr val="EEEEEE"/>
                           </a:solidFill>
                         </a:rPr>
                         <a:t>5分</a:t>
@@ -8050,7 +7501,7 @@
                       <a:r>
                         <a:rPr sz="1100">
                           <a:solidFill>
-                            <a:srgbClr val="1E293B"/>
+                            <a:srgbClr val="EEEEEE"/>
                           </a:solidFill>
                         </a:rPr>
                         <a:t>3</a:t>
@@ -8068,7 +7519,7 @@
                       <a:r>
                         <a:rPr sz="1100">
                           <a:solidFill>
-                            <a:srgbClr val="1E293B"/>
+                            <a:srgbClr val="EEEEEE"/>
                           </a:solidFill>
                         </a:rPr>
                         <a:t>出力を確認・修正指示で調整（「もっと箇条書きに」等）</a:t>
@@ -8086,7 +7537,7 @@
                       <a:r>
                         <a:rPr sz="1100">
                           <a:solidFill>
-                            <a:srgbClr val="1E293B"/>
+                            <a:srgbClr val="EEEEEE"/>
                           </a:solidFill>
                         </a:rPr>
                         <a:t>5分</a:t>
@@ -8106,7 +7557,7 @@
                       <a:r>
                         <a:rPr sz="1100">
                           <a:solidFill>
-                            <a:srgbClr val="1E293B"/>
+                            <a:srgbClr val="EEEEEE"/>
                           </a:solidFill>
                         </a:rPr>
                         <a:t>4</a:t>
@@ -8128,7 +7579,7 @@
                       <a:r>
                         <a:rPr sz="1100">
                           <a:solidFill>
-                            <a:srgbClr val="1E293B"/>
+                            <a:srgbClr val="EEEEEE"/>
                           </a:solidFill>
                         </a:rPr>
                         <a:t>見せ合い・感想共有</a:t>
@@ -8150,7 +7601,7 @@
                       <a:r>
                         <a:rPr sz="1100">
                           <a:solidFill>
-                            <a:srgbClr val="1E293B"/>
+                            <a:srgbClr val="EEEEEE"/>
                           </a:solidFill>
                         </a:rPr>
                         <a:t>3分</a:t>
@@ -8194,7 +7645,7 @@
             <a:r>
               <a:rPr sz="1300" b="1" i="0">
                 <a:solidFill>
-                  <a:srgbClr val="1E40AF"/>
+                  <a:srgbClr val="1C1C1C"/>
                 </a:solidFill>
               </a:rPr>
               <a:t>ポイント：AIへの入力は「コピペ」でOK。整形・要約は得意分野です</a:t>
@@ -8213,6 +7664,14 @@
 <file path=ppt/slides/slide7.xml><?xml version="1.0" encoding="utf-8"?>
 <p:sld xmlns:a="http://schemas.openxmlformats.org/drawingml/2006/main" xmlns:p="http://schemas.openxmlformats.org/presentationml/2006/main" xmlns:r="http://schemas.openxmlformats.org/officeDocument/2006/relationships">
   <p:cSld>
+    <p:bg>
+      <p:bgPr>
+        <a:solidFill>
+          <a:srgbClr val="1C1C1C"/>
+        </a:solidFill>
+        <a:effectLst/>
+      </p:bgPr>
+    </p:bg>
     <p:spTree>
       <p:nvGrpSpPr>
         <p:cNvPr id="1" name=""/>
@@ -8235,7 +7694,7 @@
             <a:avLst/>
           </a:prstGeom>
           <a:solidFill>
-            <a:srgbClr val="1E40AF"/>
+            <a:srgbClr val="252525"/>
           </a:solidFill>
           <a:ln>
             <a:noFill/>
@@ -8323,7 +7782,7 @@
             <a:r>
               <a:rPr sz="1200" b="0" i="0">
                 <a:solidFill>
-                  <a:srgbClr val="93C5FD"/>
+                  <a:srgbClr val="DA7756"/>
                 </a:solidFill>
               </a:rPr>
               <a:t>[実践15分]</a:t>
@@ -8415,7 +7874,7 @@
                   </a:txBody>
                   <a:tcPr>
                     <a:solidFill>
-                      <a:srgbClr val="1E40AF"/>
+                      <a:srgbClr val="1C1C1C"/>
                     </a:solidFill>
                   </a:tcPr>
                 </a:tc>
@@ -8437,7 +7896,7 @@
                   </a:txBody>
                   <a:tcPr>
                     <a:solidFill>
-                      <a:srgbClr val="1E40AF"/>
+                      <a:srgbClr val="1C1C1C"/>
                     </a:solidFill>
                   </a:tcPr>
                 </a:tc>
@@ -8452,7 +7911,7 @@
                       <a:r>
                         <a:rPr sz="1100">
                           <a:solidFill>
-                            <a:srgbClr val="1E293B"/>
+                            <a:srgbClr val="EEEEEE"/>
                           </a:solidFill>
                         </a:rPr>
                         <a:t>メール返信文</a:t>
@@ -8470,7 +7929,7 @@
                       <a:r>
                         <a:rPr sz="1100">
                           <a:solidFill>
-                            <a:srgbClr val="1E293B"/>
+                            <a:srgbClr val="EEEEEE"/>
                           </a:solidFill>
                         </a:rPr>
                         <a:t>クレーム対応・お礼・依頼・問い合わせへの返信</a:t>
@@ -8490,7 +7949,7 @@
                       <a:r>
                         <a:rPr sz="1100">
                           <a:solidFill>
-                            <a:srgbClr val="1E293B"/>
+                            <a:srgbClr val="EEEEEE"/>
                           </a:solidFill>
                         </a:rPr>
                         <a:t>報告書のたたき台</a:t>
@@ -8512,7 +7971,7 @@
                       <a:r>
                         <a:rPr sz="1100">
                           <a:solidFill>
-                            <a:srgbClr val="1E293B"/>
+                            <a:srgbClr val="EEEEEE"/>
                           </a:solidFill>
                         </a:rPr>
                         <a:t>月次・週次・プロジェクト報告書の素材作り</a:t>
@@ -8536,7 +7995,7 @@
                       <a:r>
                         <a:rPr sz="1100">
                           <a:solidFill>
-                            <a:srgbClr val="1E293B"/>
+                            <a:srgbClr val="EEEEEE"/>
                           </a:solidFill>
                         </a:rPr>
                         <a:t>社内マニュアル</a:t>
@@ -8554,7 +8013,7 @@
                       <a:r>
                         <a:rPr sz="1100">
                           <a:solidFill>
-                            <a:srgbClr val="1E293B"/>
+                            <a:srgbClr val="EEEEEE"/>
                           </a:solidFill>
                         </a:rPr>
                         <a:t>業務手順・ルール説明をわかりやすくまとめる</a:t>
@@ -8574,7 +8033,7 @@
                       <a:r>
                         <a:rPr sz="1100">
                           <a:solidFill>
-                            <a:srgbClr val="1E293B"/>
+                            <a:srgbClr val="EEEEEE"/>
                           </a:solidFill>
                         </a:rPr>
                         <a:t>社内向けお知らせ文</a:t>
@@ -8596,7 +8055,7 @@
                       <a:r>
                         <a:rPr sz="1100">
                           <a:solidFill>
-                            <a:srgbClr val="1E293B"/>
+                            <a:srgbClr val="EEEEEE"/>
                           </a:solidFill>
                         </a:rPr>
                         <a:t>休業告知・システム変更・ルール変更のアナウンス</a:t>
@@ -8620,7 +8079,7 @@
                       <a:r>
                         <a:rPr sz="1100">
                           <a:solidFill>
-                            <a:srgbClr val="1E293B"/>
+                            <a:srgbClr val="EEEEEE"/>
                           </a:solidFill>
                         </a:rPr>
                         <a:t>上司への相談文</a:t>
@@ -8638,7 +8097,7 @@
                       <a:r>
                         <a:rPr sz="1100">
                           <a:solidFill>
-                            <a:srgbClr val="1E293B"/>
+                            <a:srgbClr val="EEEEEE"/>
                           </a:solidFill>
                         </a:rPr>
                         <a:t>困っていること・提案・改善要望を整理して伝える</a:t>
@@ -8666,7 +8125,7 @@
     <p:bg>
       <p:bgPr>
         <a:solidFill>
-          <a:srgbClr val="1E40AF"/>
+          <a:srgbClr val="1C1C1C"/>
         </a:solidFill>
         <a:effectLst/>
       </p:bgPr>
@@ -8815,7 +8274,7 @@
             <a:r>
               <a:rPr sz="1400" b="0" i="0">
                 <a:solidFill>
-                  <a:srgbClr val="93C5FD"/>
+                  <a:srgbClr val="DA7756"/>
                 </a:solidFill>
               </a:rPr>
               <a:t>[30分]</a:t>
@@ -8849,7 +8308,7 @@
             <a:r>
               <a:rPr sz="1500" b="0" i="0">
                 <a:solidFill>
-                  <a:srgbClr val="BFDBFE"/>
+                  <a:srgbClr val="B8A99A"/>
                 </a:solidFill>
               </a:rPr>
               <a:t>議事録→タスク表 ／ アンケート→集計表。スプレッドシートに貼り付けて完成</a:t>
@@ -8868,6 +8327,14 @@
 <file path=ppt/slides/slide9.xml><?xml version="1.0" encoding="utf-8"?>
 <p:sld xmlns:a="http://schemas.openxmlformats.org/drawingml/2006/main" xmlns:p="http://schemas.openxmlformats.org/presentationml/2006/main" xmlns:r="http://schemas.openxmlformats.org/officeDocument/2006/relationships">
   <p:cSld>
+    <p:bg>
+      <p:bgPr>
+        <a:solidFill>
+          <a:srgbClr val="1C1C1C"/>
+        </a:solidFill>
+        <a:effectLst/>
+      </p:bgPr>
+    </p:bg>
     <p:spTree>
       <p:nvGrpSpPr>
         <p:cNvPr id="1" name=""/>
@@ -8890,7 +8357,7 @@
             <a:avLst/>
           </a:prstGeom>
           <a:solidFill>
-            <a:srgbClr val="1E40AF"/>
+            <a:srgbClr val="252525"/>
           </a:solidFill>
           <a:ln>
             <a:noFill/>
@@ -8978,7 +8445,7 @@
             <a:r>
               <a:rPr sz="1200" b="0" i="0">
                 <a:solidFill>
-                  <a:srgbClr val="93C5FD"/>
+                  <a:srgbClr val="DA7756"/>
                 </a:solidFill>
               </a:rPr>
               <a:t>[実践15分]</a:t>
@@ -9001,7 +8468,7 @@
             <a:avLst/>
           </a:prstGeom>
           <a:solidFill>
-            <a:srgbClr val="EFF6FF"/>
+            <a:srgbClr val="2F2F2F"/>
           </a:solidFill>
           <a:ln>
             <a:noFill/>
@@ -9054,7 +8521,7 @@
             <a:r>
               <a:rPr sz="1400" b="1" i="0">
                 <a:solidFill>
-                  <a:srgbClr val="1E293B"/>
+                  <a:srgbClr val="EEEEEE"/>
                 </a:solidFill>
               </a:rPr>
               <a:t>お題：「この議事録から担当者・タスク・期限の一覧表を作って、CSVで出力して」</a:t>
@@ -9104,7 +8571,7 @@
                   </a:txBody>
                   <a:tcPr>
                     <a:solidFill>
-                      <a:srgbClr val="1E40AF"/>
+                      <a:srgbClr val="1C1C1C"/>
                     </a:solidFill>
                   </a:tcPr>
                 </a:tc>
@@ -9126,7 +8593,7 @@
                   </a:txBody>
                   <a:tcPr>
                     <a:solidFill>
-                      <a:srgbClr val="1E40AF"/>
+                      <a:srgbClr val="1C1C1C"/>
                     </a:solidFill>
                   </a:tcPr>
                 </a:tc>
@@ -9148,7 +8615,7 @@
                   </a:txBody>
                   <a:tcPr>
                     <a:solidFill>
-                      <a:srgbClr val="1E40AF"/>
+                      <a:srgbClr val="1C1C1C"/>
                     </a:solidFill>
                   </a:tcPr>
                 </a:tc>
@@ -9163,7 +8630,7 @@
                       <a:r>
                         <a:rPr sz="1100">
                           <a:solidFill>
-                            <a:srgbClr val="1E293B"/>
+                            <a:srgbClr val="EEEEEE"/>
                           </a:solidFill>
                         </a:rPr>
                         <a:t>1</a:t>
@@ -9181,7 +8648,7 @@
                       <a:r>
                         <a:rPr sz="1100">
                           <a:solidFill>
-                            <a:srgbClr val="1E293B"/>
+                            <a:srgbClr val="EEEEEE"/>
                           </a:solidFill>
                         </a:rPr>
                         <a:t>自社の投稿テーマを決める（商品紹介・イベント・お知らせ等）</a:t>
@@ -9199,7 +8666,7 @@
                       <a:r>
                         <a:rPr sz="1100">
                           <a:solidFill>
-                            <a:srgbClr val="1E293B"/>
+                            <a:srgbClr val="EEEEEE"/>
                           </a:solidFill>
                         </a:rPr>
                         <a:t>2分</a:t>
@@ -9219,7 +8686,7 @@
                       <a:r>
                         <a:rPr sz="1100">
                           <a:solidFill>
-                            <a:srgbClr val="1E293B"/>
+                            <a:srgbClr val="EEEEEE"/>
                           </a:solidFill>
                         </a:rPr>
                         <a:t>2</a:t>
@@ -9241,7 +8708,7 @@
                       <a:r>
                         <a:rPr sz="1100">
                           <a:solidFill>
-                            <a:srgbClr val="1E293B"/>
+                            <a:srgbClr val="EEEEEE"/>
                           </a:solidFill>
                         </a:rPr>
                         <a:t>プロンプト入力：「会社名・業種・投稿テーマ・ハッシュタグの有無」を指定</a:t>
@@ -9263,7 +8730,7 @@
                       <a:r>
                         <a:rPr sz="1100">
                           <a:solidFill>
-                            <a:srgbClr val="1E293B"/>
+                            <a:srgbClr val="EEEEEE"/>
                           </a:solidFill>
                         </a:rPr>
                         <a:t>5分</a:t>
@@ -9287,7 +8754,7 @@
                       <a:r>
                         <a:rPr sz="1100">
                           <a:solidFill>
-                            <a:srgbClr val="1E293B"/>
+                            <a:srgbClr val="EEEEEE"/>
                           </a:solidFill>
                         </a:rPr>
                         <a:t>3</a:t>
@@ -9305,7 +8772,7 @@
                       <a:r>
                         <a:rPr sz="1100">
                           <a:solidFill>
-                            <a:srgbClr val="1E293B"/>
+                            <a:srgbClr val="EEEEEE"/>
                           </a:solidFill>
                         </a:rPr>
                         <a:t>出力確認 → 「もっとカジュアルに」「絵文字を増やして」等で調整</a:t>
@@ -9323,7 +8790,7 @@
                       <a:r>
                         <a:rPr sz="1100">
                           <a:solidFill>
-                            <a:srgbClr val="1E293B"/>
+                            <a:srgbClr val="EEEEEE"/>
                           </a:solidFill>
                         </a:rPr>
                         <a:t>5分</a:t>
@@ -9343,7 +8810,7 @@
                       <a:r>
                         <a:rPr sz="1100">
                           <a:solidFill>
-                            <a:srgbClr val="1E293B"/>
+                            <a:srgbClr val="EEEEEE"/>
                           </a:solidFill>
                         </a:rPr>
                         <a:t>4</a:t>
@@ -9365,7 +8832,7 @@
                       <a:r>
                         <a:rPr sz="1100">
                           <a:solidFill>
-                            <a:srgbClr val="1E293B"/>
+                            <a:srgbClr val="EEEEEE"/>
                           </a:solidFill>
                         </a:rPr>
                         <a:t>見せ合い・感想共有</a:t>
@@ -9387,7 +8854,7 @@
                       <a:r>
                         <a:rPr sz="1100">
                           <a:solidFill>
-                            <a:srgbClr val="1E293B"/>
+                            <a:srgbClr val="EEEEEE"/>
                           </a:solidFill>
                         </a:rPr>
                         <a:t>3分</a:t>
@@ -9430,7 +8897,7 @@
             <a:r>
               <a:rPr sz="1300" b="1" i="0">
                 <a:solidFill>
-                  <a:srgbClr val="1E40AF"/>
+                  <a:srgbClr val="1C1C1C"/>
                 </a:solidFill>
               </a:rPr>
               <a:t>操作：スプレッドシートを全選択（Ctrl+A）→ コピー（Ctrl+C）→ Geminiに貼り付け</a:t>

--- a/00-01_han-ai/training-materials/course02_jissen_bunsho.pptx
+++ b/00-01_han-ai/training-materials/course02_jissen_bunsho.pptx
@@ -3519,9 +3519,7 @@
         <a:graphic>
           <a:graphicData uri="http://schemas.openxmlformats.org/drawingml/2006/table">
             <a:tbl>
-              <a:tblPr firstRow="1" bandRow="1">
-                <a:tableStyleId>{5C22544A-7EE6-4342-B048-85BDC9FD1C3A}</a:tableStyleId>
-              </a:tblPr>
+              <a:tblPr/>
               <a:tblGrid>
                 <a:gridCol w="2468880"/>
                 <a:gridCol w="5760720"/>
@@ -4319,9 +4317,7 @@
         <a:graphic>
           <a:graphicData uri="http://schemas.openxmlformats.org/drawingml/2006/table">
             <a:tbl>
-              <a:tblPr firstRow="1" bandRow="1">
-                <a:tableStyleId>{5C22544A-7EE6-4342-B048-85BDC9FD1C3A}</a:tableStyleId>
-              </a:tblPr>
+              <a:tblPr/>
               <a:tblGrid>
                 <a:gridCol w="576072"/>
                 <a:gridCol w="6007608"/>
@@ -4875,9 +4871,7 @@
         <a:graphic>
           <a:graphicData uri="http://schemas.openxmlformats.org/drawingml/2006/table">
             <a:tbl>
-              <a:tblPr firstRow="1" bandRow="1">
-                <a:tableStyleId>{5C22544A-7EE6-4342-B048-85BDC9FD1C3A}</a:tableStyleId>
-              </a:tblPr>
+              <a:tblPr/>
               <a:tblGrid>
                 <a:gridCol w="2468880"/>
                 <a:gridCol w="5760720"/>
@@ -5737,9 +5731,7 @@
         <a:graphic>
           <a:graphicData uri="http://schemas.openxmlformats.org/drawingml/2006/table">
             <a:tbl>
-              <a:tblPr firstRow="1" bandRow="1">
-                <a:tableStyleId>{5C22544A-7EE6-4342-B048-85BDC9FD1C3A}</a:tableStyleId>
-              </a:tblPr>
+              <a:tblPr/>
               <a:tblGrid>
                 <a:gridCol w="493776"/>
                 <a:gridCol w="5925312"/>
@@ -6602,9 +6594,7 @@
         <a:graphic>
           <a:graphicData uri="http://schemas.openxmlformats.org/drawingml/2006/table">
             <a:tbl>
-              <a:tblPr firstRow="1" bandRow="1">
-                <a:tableStyleId>{5C22544A-7EE6-4342-B048-85BDC9FD1C3A}</a:tableStyleId>
-              </a:tblPr>
+              <a:tblPr/>
               <a:tblGrid>
                 <a:gridCol w="2304288"/>
                 <a:gridCol w="5925312"/>
@@ -7291,9 +7281,7 @@
         <a:graphic>
           <a:graphicData uri="http://schemas.openxmlformats.org/drawingml/2006/table">
             <a:tbl>
-              <a:tblPr firstRow="1" bandRow="1">
-                <a:tableStyleId>{5C22544A-7EE6-4342-B048-85BDC9FD1C3A}</a:tableStyleId>
-              </a:tblPr>
+              <a:tblPr/>
               <a:tblGrid>
                 <a:gridCol w="576072"/>
                 <a:gridCol w="6007608"/>
@@ -7848,9 +7836,7 @@
         <a:graphic>
           <a:graphicData uri="http://schemas.openxmlformats.org/drawingml/2006/table">
             <a:tbl>
-              <a:tblPr firstRow="1" bandRow="1">
-                <a:tableStyleId>{5C22544A-7EE6-4342-B048-85BDC9FD1C3A}</a:tableStyleId>
-              </a:tblPr>
+              <a:tblPr/>
               <a:tblGrid>
                 <a:gridCol w="2468880"/>
                 <a:gridCol w="5760720"/>
@@ -8544,9 +8530,7 @@
         <a:graphic>
           <a:graphicData uri="http://schemas.openxmlformats.org/drawingml/2006/table">
             <a:tbl>
-              <a:tblPr firstRow="1" bandRow="1">
-                <a:tableStyleId>{5C22544A-7EE6-4342-B048-85BDC9FD1C3A}</a:tableStyleId>
-              </a:tblPr>
+              <a:tblPr/>
               <a:tblGrid>
                 <a:gridCol w="576072"/>
                 <a:gridCol w="6007608"/>

--- a/00-01_han-ai/training-materials/course02_jissen_bunsho.pptx
+++ b/00-01_han-ai/training-materials/course02_jissen_bunsho.pptx
@@ -124,6 +124,14 @@
 
 <file path=ppt/slideLayouts/slideLayout1.xml><?xml version="1.0" encoding="utf-8"?>
 <p:sldLayout xmlns:a="http://schemas.openxmlformats.org/drawingml/2006/main" xmlns:r="http://schemas.openxmlformats.org/officeDocument/2006/relationships" xmlns:p="http://schemas.openxmlformats.org/presentationml/2006/main" type="title" preserve="1">
+  <p:bg>
+    <p:bgPr>
+      <a:solidFill>
+        <a:srgbClr val="1C1C1C"/>
+      </a:solidFill>
+      <a:effectLst/>
+    </p:bgPr>
+  </p:bg>
   <p:cSld name="Title Slide">
     <p:spTree>
       <p:nvGrpSpPr>
@@ -366,6 +374,14 @@
 
 <file path=ppt/slideLayouts/slideLayout10.xml><?xml version="1.0" encoding="utf-8"?>
 <p:sldLayout xmlns:a="http://schemas.openxmlformats.org/drawingml/2006/main" xmlns:r="http://schemas.openxmlformats.org/officeDocument/2006/relationships" xmlns:p="http://schemas.openxmlformats.org/presentationml/2006/main" type="vertTx" preserve="1">
+  <p:bg>
+    <p:bgPr>
+      <a:solidFill>
+        <a:srgbClr val="1C1C1C"/>
+      </a:solidFill>
+      <a:effectLst/>
+    </p:bgPr>
+  </p:bg>
   <p:cSld name="Title and Vertical Text">
     <p:spTree>
       <p:nvGrpSpPr>
@@ -536,6 +552,14 @@
 
 <file path=ppt/slideLayouts/slideLayout11.xml><?xml version="1.0" encoding="utf-8"?>
 <p:sldLayout xmlns:a="http://schemas.openxmlformats.org/drawingml/2006/main" xmlns:r="http://schemas.openxmlformats.org/officeDocument/2006/relationships" xmlns:p="http://schemas.openxmlformats.org/presentationml/2006/main" type="vertTitleAndTx" preserve="1">
+  <p:bg>
+    <p:bgPr>
+      <a:solidFill>
+        <a:srgbClr val="1C1C1C"/>
+      </a:solidFill>
+      <a:effectLst/>
+    </p:bgPr>
+  </p:bg>
   <p:cSld name="Vertical Title and Text">
     <p:spTree>
       <p:nvGrpSpPr>
@@ -716,6 +740,14 @@
 
 <file path=ppt/slideLayouts/slideLayout2.xml><?xml version="1.0" encoding="utf-8"?>
 <p:sldLayout xmlns:a="http://schemas.openxmlformats.org/drawingml/2006/main" xmlns:r="http://schemas.openxmlformats.org/officeDocument/2006/relationships" xmlns:p="http://schemas.openxmlformats.org/presentationml/2006/main" type="obj" preserve="1">
+  <p:bg>
+    <p:bgPr>
+      <a:solidFill>
+        <a:srgbClr val="1C1C1C"/>
+      </a:solidFill>
+      <a:effectLst/>
+    </p:bgPr>
+  </p:bg>
   <p:cSld name="Title and Content">
     <p:spTree>
       <p:nvGrpSpPr>
@@ -886,6 +918,14 @@
 
 <file path=ppt/slideLayouts/slideLayout3.xml><?xml version="1.0" encoding="utf-8"?>
 <p:sldLayout xmlns:a="http://schemas.openxmlformats.org/drawingml/2006/main" xmlns:r="http://schemas.openxmlformats.org/officeDocument/2006/relationships" xmlns:p="http://schemas.openxmlformats.org/presentationml/2006/main" type="secHead" preserve="1">
+  <p:bg>
+    <p:bgPr>
+      <a:solidFill>
+        <a:srgbClr val="1C1C1C"/>
+      </a:solidFill>
+      <a:effectLst/>
+    </p:bgPr>
+  </p:bg>
   <p:cSld name="Section Header">
     <p:spTree>
       <p:nvGrpSpPr>
@@ -1132,6 +1172,14 @@
 
 <file path=ppt/slideLayouts/slideLayout4.xml><?xml version="1.0" encoding="utf-8"?>
 <p:sldLayout xmlns:a="http://schemas.openxmlformats.org/drawingml/2006/main" xmlns:r="http://schemas.openxmlformats.org/officeDocument/2006/relationships" xmlns:p="http://schemas.openxmlformats.org/presentationml/2006/main" type="twoObj" preserve="1">
+  <p:bg>
+    <p:bgPr>
+      <a:solidFill>
+        <a:srgbClr val="1C1C1C"/>
+      </a:solidFill>
+      <a:effectLst/>
+    </p:bgPr>
+  </p:bg>
   <p:cSld name="Two Content">
     <p:spTree>
       <p:nvGrpSpPr>
@@ -1420,6 +1468,14 @@
 
 <file path=ppt/slideLayouts/slideLayout5.xml><?xml version="1.0" encoding="utf-8"?>
 <p:sldLayout xmlns:a="http://schemas.openxmlformats.org/drawingml/2006/main" xmlns:r="http://schemas.openxmlformats.org/officeDocument/2006/relationships" xmlns:p="http://schemas.openxmlformats.org/presentationml/2006/main" type="twoTxTwoObj" preserve="1">
+  <p:bg>
+    <p:bgPr>
+      <a:solidFill>
+        <a:srgbClr val="1C1C1C"/>
+      </a:solidFill>
+      <a:effectLst/>
+    </p:bgPr>
+  </p:bg>
   <p:cSld name="Comparison">
     <p:spTree>
       <p:nvGrpSpPr>
@@ -1842,6 +1898,14 @@
 
 <file path=ppt/slideLayouts/slideLayout6.xml><?xml version="1.0" encoding="utf-8"?>
 <p:sldLayout xmlns:a="http://schemas.openxmlformats.org/drawingml/2006/main" xmlns:r="http://schemas.openxmlformats.org/officeDocument/2006/relationships" xmlns:p="http://schemas.openxmlformats.org/presentationml/2006/main" type="titleOnly" preserve="1">
+  <p:bg>
+    <p:bgPr>
+      <a:solidFill>
+        <a:srgbClr val="1C1C1C"/>
+      </a:solidFill>
+      <a:effectLst/>
+    </p:bgPr>
+  </p:bg>
   <p:cSld name="Title Only">
     <p:spTree>
       <p:nvGrpSpPr>
@@ -1960,6 +2024,14 @@
 
 <file path=ppt/slideLayouts/slideLayout7.xml><?xml version="1.0" encoding="utf-8"?>
 <p:sldLayout xmlns:a="http://schemas.openxmlformats.org/drawingml/2006/main" xmlns:r="http://schemas.openxmlformats.org/officeDocument/2006/relationships" xmlns:p="http://schemas.openxmlformats.org/presentationml/2006/main" type="blank" preserve="1">
+  <p:bg>
+    <p:bgPr>
+      <a:solidFill>
+        <a:srgbClr val="1C1C1C"/>
+      </a:solidFill>
+      <a:effectLst/>
+    </p:bgPr>
+  </p:bg>
   <p:cSld name="Blank">
     <p:spTree>
       <p:nvGrpSpPr>
@@ -2055,6 +2127,14 @@
 
 <file path=ppt/slideLayouts/slideLayout8.xml><?xml version="1.0" encoding="utf-8"?>
 <p:sldLayout xmlns:a="http://schemas.openxmlformats.org/drawingml/2006/main" xmlns:r="http://schemas.openxmlformats.org/officeDocument/2006/relationships" xmlns:p="http://schemas.openxmlformats.org/presentationml/2006/main" type="objTx" preserve="1">
+  <p:bg>
+    <p:bgPr>
+      <a:solidFill>
+        <a:srgbClr val="1C1C1C"/>
+      </a:solidFill>
+      <a:effectLst/>
+    </p:bgPr>
+  </p:bg>
   <p:cSld name="Content with Caption">
     <p:spTree>
       <p:nvGrpSpPr>
@@ -2332,6 +2412,14 @@
 
 <file path=ppt/slideLayouts/slideLayout9.xml><?xml version="1.0" encoding="utf-8"?>
 <p:sldLayout xmlns:a="http://schemas.openxmlformats.org/drawingml/2006/main" xmlns:r="http://schemas.openxmlformats.org/officeDocument/2006/relationships" xmlns:p="http://schemas.openxmlformats.org/presentationml/2006/main" type="picTx" preserve="1">
+  <p:bg>
+    <p:bgPr>
+      <a:solidFill>
+        <a:srgbClr val="1C1C1C"/>
+      </a:solidFill>
+      <a:effectLst/>
+    </p:bgPr>
+  </p:bg>
   <p:cSld name="Picture with Caption">
     <p:spTree>
       <p:nvGrpSpPr>
@@ -2587,9 +2675,12 @@
 <p:sldMaster xmlns:a="http://schemas.openxmlformats.org/drawingml/2006/main" xmlns:r="http://schemas.openxmlformats.org/officeDocument/2006/relationships" xmlns:p="http://schemas.openxmlformats.org/presentationml/2006/main">
   <p:cSld>
     <p:bg>
-      <p:bgRef idx="1001">
-        <a:schemeClr val="bg1"/>
-      </p:bgRef>
+      <p:bgPr>
+        <a:solidFill>
+          <a:srgbClr val="1C1C1C"/>
+        </a:solidFill>
+        <a:effectLst/>
+      </p:bgPr>
     </p:bg>
     <p:spTree>
       <p:nvGrpSpPr>
@@ -2826,7 +2917,7 @@
       </p:ext>
     </p:extLst>
   </p:cSld>
-  <p:clrMap bg1="lt1" tx1="dk1" bg2="lt2" tx2="dk2" accent1="accent1" accent2="accent2" accent3="accent3" accent4="accent4" accent5="accent5" accent6="accent6" hlink="hlink" folHlink="folHlink"/>
+  <p:clrMap bg1="dk1" tx1="dk1" bg2="lt2" tx2="dk2" accent1="accent1" accent2="accent2" accent3="accent3" accent4="accent4" accent5="accent5" accent6="accent6" hlink="hlink" folHlink="folHlink"/>
   <p:sldLayoutIdLst>
     <p:sldLayoutId id="2147483649" r:id="rId1"/>
     <p:sldLayoutId id="2147483650" r:id="rId2"/>
@@ -8908,13 +8999,13 @@
         <a:sysClr val="window" lastClr="FFFFFF"/>
       </a:lt1>
       <a:dk2>
-        <a:srgbClr val="1F497D"/>
+        <a:srgbClr val="252525"/>
       </a:dk2>
       <a:lt2>
         <a:srgbClr val="EEECE1"/>
       </a:lt2>
       <a:accent1>
-        <a:srgbClr val="4F81BD"/>
+        <a:srgbClr val="DA7756"/>
       </a:accent1>
       <a:accent2>
         <a:srgbClr val="C0504D"/>

--- a/00-01_han-ai/training-materials/course02_jissen_bunsho.pptx
+++ b/00-01_han-ai/training-materials/course02_jissen_bunsho.pptx
@@ -3202,6 +3202,35 @@
         <p:nvPr/>
       </p:nvGrpSpPr>
       <p:grpSpPr/>
+      <p:sp xmlns:a="http://schemas.openxmlformats.org/drawingml/2006/main" xmlns:p="http://schemas.openxmlformats.org/presentationml/2006/main">
+        <p:nvSpPr>
+          <p:cNvPr id="9900" name="_BG_DARK_"/>
+          <p:cNvSpPr>
+            <a:spLocks noSelect="1" noMove="1" noResize="1"/>
+          </p:cNvSpPr>
+          <p:nvPr/>
+        </p:nvSpPr>
+        <p:spPr>
+          <a:xfrm>
+            <a:off x="0" y="0"/>
+            <a:ext cx="9144000" cy="5143500"/>
+          </a:xfrm>
+          <a:prstGeom prst="rect">
+            <a:avLst/>
+          </a:prstGeom>
+          <a:solidFill>
+            <a:srgbClr val="1C1C1C"/>
+          </a:solidFill>
+          <a:ln>
+            <a:noFill/>
+          </a:ln>
+        </p:spPr>
+        <p:txBody>
+          <a:bodyPr/>
+          <a:lstStyle/>
+          <a:p/>
+        </p:txBody>
+      </p:sp>
       <p:sp>
         <p:nvSpPr>
           <p:cNvPr id="2" name="Rectangle 1"/>
@@ -3441,6 +3470,35 @@
         <p:nvPr/>
       </p:nvGrpSpPr>
       <p:grpSpPr/>
+      <p:sp xmlns:a="http://schemas.openxmlformats.org/drawingml/2006/main" xmlns:p="http://schemas.openxmlformats.org/presentationml/2006/main">
+        <p:nvSpPr>
+          <p:cNvPr id="9900" name="_BG_DARK_"/>
+          <p:cNvSpPr>
+            <a:spLocks noSelect="1" noMove="1" noResize="1"/>
+          </p:cNvSpPr>
+          <p:nvPr/>
+        </p:nvSpPr>
+        <p:spPr>
+          <a:xfrm>
+            <a:off x="0" y="0"/>
+            <a:ext cx="9144000" cy="5143500"/>
+          </a:xfrm>
+          <a:prstGeom prst="rect">
+            <a:avLst/>
+          </a:prstGeom>
+          <a:solidFill>
+            <a:srgbClr val="1C1C1C"/>
+          </a:solidFill>
+          <a:ln>
+            <a:noFill/>
+          </a:ln>
+        </p:spPr>
+        <p:txBody>
+          <a:bodyPr/>
+          <a:lstStyle/>
+          <a:p/>
+        </p:txBody>
+      </p:sp>
       <p:sp>
         <p:nvSpPr>
           <p:cNvPr id="2" name="Rectangle 1"/>
@@ -3897,6 +3955,35 @@
         <p:nvPr/>
       </p:nvGrpSpPr>
       <p:grpSpPr/>
+      <p:sp xmlns:a="http://schemas.openxmlformats.org/drawingml/2006/main" xmlns:p="http://schemas.openxmlformats.org/presentationml/2006/main">
+        <p:nvSpPr>
+          <p:cNvPr id="9900" name="_BG_DARK_"/>
+          <p:cNvSpPr>
+            <a:spLocks noSelect="1" noMove="1" noResize="1"/>
+          </p:cNvSpPr>
+          <p:nvPr/>
+        </p:nvSpPr>
+        <p:spPr>
+          <a:xfrm>
+            <a:off x="0" y="0"/>
+            <a:ext cx="9144000" cy="5143500"/>
+          </a:xfrm>
+          <a:prstGeom prst="rect">
+            <a:avLst/>
+          </a:prstGeom>
+          <a:solidFill>
+            <a:srgbClr val="1C1C1C"/>
+          </a:solidFill>
+          <a:ln>
+            <a:noFill/>
+          </a:ln>
+        </p:spPr>
+        <p:txBody>
+          <a:bodyPr/>
+          <a:lstStyle/>
+          <a:p/>
+        </p:txBody>
+      </p:sp>
       <p:sp>
         <p:nvSpPr>
           <p:cNvPr id="2" name="TextBox 1"/>
@@ -3991,6 +4078,35 @@
         <p:nvPr/>
       </p:nvGrpSpPr>
       <p:grpSpPr/>
+      <p:sp xmlns:a="http://schemas.openxmlformats.org/drawingml/2006/main" xmlns:p="http://schemas.openxmlformats.org/presentationml/2006/main">
+        <p:nvSpPr>
+          <p:cNvPr id="9900" name="_BG_DARK_"/>
+          <p:cNvSpPr>
+            <a:spLocks noSelect="1" noMove="1" noResize="1"/>
+          </p:cNvSpPr>
+          <p:nvPr/>
+        </p:nvSpPr>
+        <p:spPr>
+          <a:xfrm>
+            <a:off x="0" y="0"/>
+            <a:ext cx="9144000" cy="5143500"/>
+          </a:xfrm>
+          <a:prstGeom prst="rect">
+            <a:avLst/>
+          </a:prstGeom>
+          <a:solidFill>
+            <a:srgbClr val="1C1C1C"/>
+          </a:solidFill>
+          <a:ln>
+            <a:noFill/>
+          </a:ln>
+        </p:spPr>
+        <p:txBody>
+          <a:bodyPr/>
+          <a:lstStyle/>
+          <a:p/>
+        </p:txBody>
+      </p:sp>
       <p:sp>
         <p:nvSpPr>
           <p:cNvPr id="2" name="Rectangle 1"/>
@@ -4196,6 +4312,35 @@
         <p:nvPr/>
       </p:nvGrpSpPr>
       <p:grpSpPr/>
+      <p:sp xmlns:a="http://schemas.openxmlformats.org/drawingml/2006/main" xmlns:p="http://schemas.openxmlformats.org/presentationml/2006/main">
+        <p:nvSpPr>
+          <p:cNvPr id="9900" name="_BG_DARK_"/>
+          <p:cNvSpPr>
+            <a:spLocks noSelect="1" noMove="1" noResize="1"/>
+          </p:cNvSpPr>
+          <p:nvPr/>
+        </p:nvSpPr>
+        <p:spPr>
+          <a:xfrm>
+            <a:off x="0" y="0"/>
+            <a:ext cx="9144000" cy="5143500"/>
+          </a:xfrm>
+          <a:prstGeom prst="rect">
+            <a:avLst/>
+          </a:prstGeom>
+          <a:solidFill>
+            <a:srgbClr val="1C1C1C"/>
+          </a:solidFill>
+          <a:ln>
+            <a:noFill/>
+          </a:ln>
+        </p:spPr>
+        <p:txBody>
+          <a:bodyPr/>
+          <a:lstStyle/>
+          <a:p/>
+        </p:txBody>
+      </p:sp>
       <p:sp>
         <p:nvSpPr>
           <p:cNvPr id="2" name="Rectangle 1"/>
@@ -4793,6 +4938,35 @@
         <p:nvPr/>
       </p:nvGrpSpPr>
       <p:grpSpPr/>
+      <p:sp xmlns:a="http://schemas.openxmlformats.org/drawingml/2006/main" xmlns:p="http://schemas.openxmlformats.org/presentationml/2006/main">
+        <p:nvSpPr>
+          <p:cNvPr id="9900" name="_BG_DARK_"/>
+          <p:cNvSpPr>
+            <a:spLocks noSelect="1" noMove="1" noResize="1"/>
+          </p:cNvSpPr>
+          <p:nvPr/>
+        </p:nvSpPr>
+        <p:spPr>
+          <a:xfrm>
+            <a:off x="0" y="0"/>
+            <a:ext cx="9144000" cy="5143500"/>
+          </a:xfrm>
+          <a:prstGeom prst="rect">
+            <a:avLst/>
+          </a:prstGeom>
+          <a:solidFill>
+            <a:srgbClr val="1C1C1C"/>
+          </a:solidFill>
+          <a:ln>
+            <a:noFill/>
+          </a:ln>
+        </p:spPr>
+        <p:txBody>
+          <a:bodyPr/>
+          <a:lstStyle/>
+          <a:p/>
+        </p:txBody>
+      </p:sp>
       <p:sp>
         <p:nvSpPr>
           <p:cNvPr id="2" name="Rectangle 1"/>
@@ -5249,6 +5423,35 @@
         <p:nvPr/>
       </p:nvGrpSpPr>
       <p:grpSpPr/>
+      <p:sp xmlns:a="http://schemas.openxmlformats.org/drawingml/2006/main" xmlns:p="http://schemas.openxmlformats.org/presentationml/2006/main">
+        <p:nvSpPr>
+          <p:cNvPr id="9900" name="_BG_DARK_"/>
+          <p:cNvSpPr>
+            <a:spLocks noSelect="1" noMove="1" noResize="1"/>
+          </p:cNvSpPr>
+          <p:nvPr/>
+        </p:nvSpPr>
+        <p:spPr>
+          <a:xfrm>
+            <a:off x="0" y="0"/>
+            <a:ext cx="9144000" cy="5143500"/>
+          </a:xfrm>
+          <a:prstGeom prst="rect">
+            <a:avLst/>
+          </a:prstGeom>
+          <a:solidFill>
+            <a:srgbClr val="1C1C1C"/>
+          </a:solidFill>
+          <a:ln>
+            <a:noFill/>
+          </a:ln>
+        </p:spPr>
+        <p:txBody>
+          <a:bodyPr/>
+          <a:lstStyle/>
+          <a:p/>
+        </p:txBody>
+      </p:sp>
       <p:sp>
         <p:nvSpPr>
           <p:cNvPr id="2" name="Rectangle 1"/>
@@ -5420,6 +5623,35 @@
         <p:nvPr/>
       </p:nvGrpSpPr>
       <p:grpSpPr/>
+      <p:sp xmlns:a="http://schemas.openxmlformats.org/drawingml/2006/main" xmlns:p="http://schemas.openxmlformats.org/presentationml/2006/main">
+        <p:nvSpPr>
+          <p:cNvPr id="9900" name="_BG_DARK_"/>
+          <p:cNvSpPr>
+            <a:spLocks noSelect="1" noMove="1" noResize="1"/>
+          </p:cNvSpPr>
+          <p:nvPr/>
+        </p:nvSpPr>
+        <p:spPr>
+          <a:xfrm>
+            <a:off x="0" y="0"/>
+            <a:ext cx="9144000" cy="5143500"/>
+          </a:xfrm>
+          <a:prstGeom prst="rect">
+            <a:avLst/>
+          </a:prstGeom>
+          <a:solidFill>
+            <a:srgbClr val="1C1C1C"/>
+          </a:solidFill>
+          <a:ln>
+            <a:noFill/>
+          </a:ln>
+        </p:spPr>
+        <p:txBody>
+          <a:bodyPr/>
+          <a:lstStyle/>
+          <a:p/>
+        </p:txBody>
+      </p:sp>
       <p:sp>
         <p:nvSpPr>
           <p:cNvPr id="2" name="Rectangle 1"/>
@@ -5730,6 +5962,35 @@
         <p:nvPr/>
       </p:nvGrpSpPr>
       <p:grpSpPr/>
+      <p:sp xmlns:a="http://schemas.openxmlformats.org/drawingml/2006/main" xmlns:p="http://schemas.openxmlformats.org/presentationml/2006/main">
+        <p:nvSpPr>
+          <p:cNvPr id="9900" name="_BG_DARK_"/>
+          <p:cNvSpPr>
+            <a:spLocks noSelect="1" noMove="1" noResize="1"/>
+          </p:cNvSpPr>
+          <p:nvPr/>
+        </p:nvSpPr>
+        <p:spPr>
+          <a:xfrm>
+            <a:off x="0" y="0"/>
+            <a:ext cx="9144000" cy="5143500"/>
+          </a:xfrm>
+          <a:prstGeom prst="rect">
+            <a:avLst/>
+          </a:prstGeom>
+          <a:solidFill>
+            <a:srgbClr val="1C1C1C"/>
+          </a:solidFill>
+          <a:ln>
+            <a:noFill/>
+          </a:ln>
+        </p:spPr>
+        <p:txBody>
+          <a:bodyPr/>
+          <a:lstStyle/>
+          <a:p/>
+        </p:txBody>
+      </p:sp>
       <p:sp>
         <p:nvSpPr>
           <p:cNvPr id="2" name="Rectangle 1"/>
@@ -6354,6 +6615,35 @@
         <p:nvPr/>
       </p:nvGrpSpPr>
       <p:grpSpPr/>
+      <p:sp xmlns:a="http://schemas.openxmlformats.org/drawingml/2006/main" xmlns:p="http://schemas.openxmlformats.org/presentationml/2006/main">
+        <p:nvSpPr>
+          <p:cNvPr id="9900" name="_BG_DARK_"/>
+          <p:cNvSpPr>
+            <a:spLocks noSelect="1" noMove="1" noResize="1"/>
+          </p:cNvSpPr>
+          <p:nvPr/>
+        </p:nvSpPr>
+        <p:spPr>
+          <a:xfrm>
+            <a:off x="0" y="0"/>
+            <a:ext cx="9144000" cy="5143500"/>
+          </a:xfrm>
+          <a:prstGeom prst="rect">
+            <a:avLst/>
+          </a:prstGeom>
+          <a:solidFill>
+            <a:srgbClr val="1C1C1C"/>
+          </a:solidFill>
+          <a:ln>
+            <a:noFill/>
+          </a:ln>
+        </p:spPr>
+        <p:txBody>
+          <a:bodyPr/>
+          <a:lstStyle/>
+          <a:p/>
+        </p:txBody>
+      </p:sp>
       <p:sp>
         <p:nvSpPr>
           <p:cNvPr id="2" name="Rectangle 1"/>
@@ -6559,6 +6849,35 @@
         <p:nvPr/>
       </p:nvGrpSpPr>
       <p:grpSpPr/>
+      <p:sp xmlns:a="http://schemas.openxmlformats.org/drawingml/2006/main" xmlns:p="http://schemas.openxmlformats.org/presentationml/2006/main">
+        <p:nvSpPr>
+          <p:cNvPr id="9900" name="_BG_DARK_"/>
+          <p:cNvSpPr>
+            <a:spLocks noSelect="1" noMove="1" noResize="1"/>
+          </p:cNvSpPr>
+          <p:nvPr/>
+        </p:nvSpPr>
+        <p:spPr>
+          <a:xfrm>
+            <a:off x="0" y="0"/>
+            <a:ext cx="9144000" cy="5143500"/>
+          </a:xfrm>
+          <a:prstGeom prst="rect">
+            <a:avLst/>
+          </a:prstGeom>
+          <a:solidFill>
+            <a:srgbClr val="1C1C1C"/>
+          </a:solidFill>
+          <a:ln>
+            <a:noFill/>
+          </a:ln>
+        </p:spPr>
+        <p:txBody>
+          <a:bodyPr/>
+          <a:lstStyle/>
+          <a:p/>
+        </p:txBody>
+      </p:sp>
       <p:sp>
         <p:nvSpPr>
           <p:cNvPr id="2" name="Rectangle 1"/>
@@ -6964,6 +7283,35 @@
         <p:nvPr/>
       </p:nvGrpSpPr>
       <p:grpSpPr/>
+      <p:sp xmlns:a="http://schemas.openxmlformats.org/drawingml/2006/main" xmlns:p="http://schemas.openxmlformats.org/presentationml/2006/main">
+        <p:nvSpPr>
+          <p:cNvPr id="9900" name="_BG_DARK_"/>
+          <p:cNvSpPr>
+            <a:spLocks noSelect="1" noMove="1" noResize="1"/>
+          </p:cNvSpPr>
+          <p:nvPr/>
+        </p:nvSpPr>
+        <p:spPr>
+          <a:xfrm>
+            <a:off x="0" y="0"/>
+            <a:ext cx="9144000" cy="5143500"/>
+          </a:xfrm>
+          <a:prstGeom prst="rect">
+            <a:avLst/>
+          </a:prstGeom>
+          <a:solidFill>
+            <a:srgbClr val="1C1C1C"/>
+          </a:solidFill>
+          <a:ln>
+            <a:noFill/>
+          </a:ln>
+        </p:spPr>
+        <p:txBody>
+          <a:bodyPr/>
+          <a:lstStyle/>
+          <a:p/>
+        </p:txBody>
+      </p:sp>
       <p:sp>
         <p:nvSpPr>
           <p:cNvPr id="2" name="Rectangle 1"/>
@@ -7169,6 +7517,35 @@
         <p:nvPr/>
       </p:nvGrpSpPr>
       <p:grpSpPr/>
+      <p:sp xmlns:a="http://schemas.openxmlformats.org/drawingml/2006/main" xmlns:p="http://schemas.openxmlformats.org/presentationml/2006/main">
+        <p:nvSpPr>
+          <p:cNvPr id="9900" name="_BG_DARK_"/>
+          <p:cNvSpPr>
+            <a:spLocks noSelect="1" noMove="1" noResize="1"/>
+          </p:cNvSpPr>
+          <p:nvPr/>
+        </p:nvSpPr>
+        <p:spPr>
+          <a:xfrm>
+            <a:off x="0" y="0"/>
+            <a:ext cx="9144000" cy="5143500"/>
+          </a:xfrm>
+          <a:prstGeom prst="rect">
+            <a:avLst/>
+          </a:prstGeom>
+          <a:solidFill>
+            <a:srgbClr val="1C1C1C"/>
+          </a:solidFill>
+          <a:ln>
+            <a:noFill/>
+          </a:ln>
+        </p:spPr>
+        <p:txBody>
+          <a:bodyPr/>
+          <a:lstStyle/>
+          <a:p/>
+        </p:txBody>
+      </p:sp>
       <p:sp>
         <p:nvSpPr>
           <p:cNvPr id="2" name="Rectangle 1"/>
@@ -7758,6 +8135,35 @@
         <p:nvPr/>
       </p:nvGrpSpPr>
       <p:grpSpPr/>
+      <p:sp xmlns:a="http://schemas.openxmlformats.org/drawingml/2006/main" xmlns:p="http://schemas.openxmlformats.org/presentationml/2006/main">
+        <p:nvSpPr>
+          <p:cNvPr id="9900" name="_BG_DARK_"/>
+          <p:cNvSpPr>
+            <a:spLocks noSelect="1" noMove="1" noResize="1"/>
+          </p:cNvSpPr>
+          <p:nvPr/>
+        </p:nvSpPr>
+        <p:spPr>
+          <a:xfrm>
+            <a:off x="0" y="0"/>
+            <a:ext cx="9144000" cy="5143500"/>
+          </a:xfrm>
+          <a:prstGeom prst="rect">
+            <a:avLst/>
+          </a:prstGeom>
+          <a:solidFill>
+            <a:srgbClr val="1C1C1C"/>
+          </a:solidFill>
+          <a:ln>
+            <a:noFill/>
+          </a:ln>
+        </p:spPr>
+        <p:txBody>
+          <a:bodyPr/>
+          <a:lstStyle/>
+          <a:p/>
+        </p:txBody>
+      </p:sp>
       <p:sp>
         <p:nvSpPr>
           <p:cNvPr id="2" name="Rectangle 1"/>
@@ -8214,6 +8620,35 @@
         <p:nvPr/>
       </p:nvGrpSpPr>
       <p:grpSpPr/>
+      <p:sp xmlns:a="http://schemas.openxmlformats.org/drawingml/2006/main" xmlns:p="http://schemas.openxmlformats.org/presentationml/2006/main">
+        <p:nvSpPr>
+          <p:cNvPr id="9900" name="_BG_DARK_"/>
+          <p:cNvSpPr>
+            <a:spLocks noSelect="1" noMove="1" noResize="1"/>
+          </p:cNvSpPr>
+          <p:nvPr/>
+        </p:nvSpPr>
+        <p:spPr>
+          <a:xfrm>
+            <a:off x="0" y="0"/>
+            <a:ext cx="9144000" cy="5143500"/>
+          </a:xfrm>
+          <a:prstGeom prst="rect">
+            <a:avLst/>
+          </a:prstGeom>
+          <a:solidFill>
+            <a:srgbClr val="1C1C1C"/>
+          </a:solidFill>
+          <a:ln>
+            <a:noFill/>
+          </a:ln>
+        </p:spPr>
+        <p:txBody>
+          <a:bodyPr/>
+          <a:lstStyle/>
+          <a:p/>
+        </p:txBody>
+      </p:sp>
       <p:sp>
         <p:nvSpPr>
           <p:cNvPr id="2" name="Rectangle 1"/>
@@ -8419,6 +8854,35 @@
         <p:nvPr/>
       </p:nvGrpSpPr>
       <p:grpSpPr/>
+      <p:sp xmlns:a="http://schemas.openxmlformats.org/drawingml/2006/main" xmlns:p="http://schemas.openxmlformats.org/presentationml/2006/main">
+        <p:nvSpPr>
+          <p:cNvPr id="9900" name="_BG_DARK_"/>
+          <p:cNvSpPr>
+            <a:spLocks noSelect="1" noMove="1" noResize="1"/>
+          </p:cNvSpPr>
+          <p:nvPr/>
+        </p:nvSpPr>
+        <p:spPr>
+          <a:xfrm>
+            <a:off x="0" y="0"/>
+            <a:ext cx="9144000" cy="5143500"/>
+          </a:xfrm>
+          <a:prstGeom prst="rect">
+            <a:avLst/>
+          </a:prstGeom>
+          <a:solidFill>
+            <a:srgbClr val="1C1C1C"/>
+          </a:solidFill>
+          <a:ln>
+            <a:noFill/>
+          </a:ln>
+        </p:spPr>
+        <p:txBody>
+          <a:bodyPr/>
+          <a:lstStyle/>
+          <a:p/>
+        </p:txBody>
+      </p:sp>
       <p:sp>
         <p:nvSpPr>
           <p:cNvPr id="2" name="Rectangle 1"/>

--- a/00-01_han-ai/training-materials/course02_jissen_bunsho.pptx
+++ b/00-01_han-ai/training-materials/course02_jissen_bunsho.pptx
@@ -3202,12 +3202,10 @@
         <p:nvPr/>
       </p:nvGrpSpPr>
       <p:grpSpPr/>
-      <p:sp xmlns:a="http://schemas.openxmlformats.org/drawingml/2006/main" xmlns:p="http://schemas.openxmlformats.org/presentationml/2006/main">
+      <p:sp>
         <p:nvSpPr>
           <p:cNvPr id="9900" name="_BG_DARK_"/>
-          <p:cNvSpPr>
-            <a:spLocks noSelect="1" noMove="1" noResize="1"/>
-          </p:cNvSpPr>
+          <p:cNvSpPr/>
           <p:nvPr/>
         </p:nvSpPr>
         <p:spPr>
@@ -3225,6 +3223,20 @@
             <a:noFill/>
           </a:ln>
         </p:spPr>
+        <p:style>
+          <a:lnRef idx="1">
+            <a:srgbClr val="1C1C1C"/>
+          </a:lnRef>
+          <a:fillRef idx="1">
+            <a:srgbClr val="1C1C1C"/>
+          </a:fillRef>
+          <a:effectRef idx="0">
+            <a:srgbClr val="1C1C1C"/>
+          </a:effectRef>
+          <a:fontRef idx="minor">
+            <a:srgbClr val="EEEEEE"/>
+          </a:fontRef>
+        </p:style>
         <p:txBody>
           <a:bodyPr/>
           <a:lstStyle/>
@@ -3470,12 +3482,10 @@
         <p:nvPr/>
       </p:nvGrpSpPr>
       <p:grpSpPr/>
-      <p:sp xmlns:a="http://schemas.openxmlformats.org/drawingml/2006/main" xmlns:p="http://schemas.openxmlformats.org/presentationml/2006/main">
+      <p:sp>
         <p:nvSpPr>
           <p:cNvPr id="9900" name="_BG_DARK_"/>
-          <p:cNvSpPr>
-            <a:spLocks noSelect="1" noMove="1" noResize="1"/>
-          </p:cNvSpPr>
+          <p:cNvSpPr/>
           <p:nvPr/>
         </p:nvSpPr>
         <p:spPr>
@@ -3493,6 +3503,20 @@
             <a:noFill/>
           </a:ln>
         </p:spPr>
+        <p:style>
+          <a:lnRef idx="1">
+            <a:srgbClr val="1C1C1C"/>
+          </a:lnRef>
+          <a:fillRef idx="1">
+            <a:srgbClr val="1C1C1C"/>
+          </a:fillRef>
+          <a:effectRef idx="0">
+            <a:srgbClr val="1C1C1C"/>
+          </a:effectRef>
+          <a:fontRef idx="minor">
+            <a:srgbClr val="EEEEEE"/>
+          </a:fontRef>
+        </p:style>
         <p:txBody>
           <a:bodyPr/>
           <a:lstStyle/>
@@ -3955,12 +3979,10 @@
         <p:nvPr/>
       </p:nvGrpSpPr>
       <p:grpSpPr/>
-      <p:sp xmlns:a="http://schemas.openxmlformats.org/drawingml/2006/main" xmlns:p="http://schemas.openxmlformats.org/presentationml/2006/main">
+      <p:sp>
         <p:nvSpPr>
           <p:cNvPr id="9900" name="_BG_DARK_"/>
-          <p:cNvSpPr>
-            <a:spLocks noSelect="1" noMove="1" noResize="1"/>
-          </p:cNvSpPr>
+          <p:cNvSpPr/>
           <p:nvPr/>
         </p:nvSpPr>
         <p:spPr>
@@ -3978,6 +4000,20 @@
             <a:noFill/>
           </a:ln>
         </p:spPr>
+        <p:style>
+          <a:lnRef idx="1">
+            <a:srgbClr val="1C1C1C"/>
+          </a:lnRef>
+          <a:fillRef idx="1">
+            <a:srgbClr val="1C1C1C"/>
+          </a:fillRef>
+          <a:effectRef idx="0">
+            <a:srgbClr val="1C1C1C"/>
+          </a:effectRef>
+          <a:fontRef idx="minor">
+            <a:srgbClr val="EEEEEE"/>
+          </a:fontRef>
+        </p:style>
         <p:txBody>
           <a:bodyPr/>
           <a:lstStyle/>
@@ -4078,12 +4114,10 @@
         <p:nvPr/>
       </p:nvGrpSpPr>
       <p:grpSpPr/>
-      <p:sp xmlns:a="http://schemas.openxmlformats.org/drawingml/2006/main" xmlns:p="http://schemas.openxmlformats.org/presentationml/2006/main">
+      <p:sp>
         <p:nvSpPr>
           <p:cNvPr id="9900" name="_BG_DARK_"/>
-          <p:cNvSpPr>
-            <a:spLocks noSelect="1" noMove="1" noResize="1"/>
-          </p:cNvSpPr>
+          <p:cNvSpPr/>
           <p:nvPr/>
         </p:nvSpPr>
         <p:spPr>
@@ -4101,6 +4135,20 @@
             <a:noFill/>
           </a:ln>
         </p:spPr>
+        <p:style>
+          <a:lnRef idx="1">
+            <a:srgbClr val="1C1C1C"/>
+          </a:lnRef>
+          <a:fillRef idx="1">
+            <a:srgbClr val="1C1C1C"/>
+          </a:fillRef>
+          <a:effectRef idx="0">
+            <a:srgbClr val="1C1C1C"/>
+          </a:effectRef>
+          <a:fontRef idx="minor">
+            <a:srgbClr val="EEEEEE"/>
+          </a:fontRef>
+        </p:style>
         <p:txBody>
           <a:bodyPr/>
           <a:lstStyle/>
@@ -4312,12 +4360,10 @@
         <p:nvPr/>
       </p:nvGrpSpPr>
       <p:grpSpPr/>
-      <p:sp xmlns:a="http://schemas.openxmlformats.org/drawingml/2006/main" xmlns:p="http://schemas.openxmlformats.org/presentationml/2006/main">
+      <p:sp>
         <p:nvSpPr>
           <p:cNvPr id="9900" name="_BG_DARK_"/>
-          <p:cNvSpPr>
-            <a:spLocks noSelect="1" noMove="1" noResize="1"/>
-          </p:cNvSpPr>
+          <p:cNvSpPr/>
           <p:nvPr/>
         </p:nvSpPr>
         <p:spPr>
@@ -4335,6 +4381,20 @@
             <a:noFill/>
           </a:ln>
         </p:spPr>
+        <p:style>
+          <a:lnRef idx="1">
+            <a:srgbClr val="1C1C1C"/>
+          </a:lnRef>
+          <a:fillRef idx="1">
+            <a:srgbClr val="1C1C1C"/>
+          </a:fillRef>
+          <a:effectRef idx="0">
+            <a:srgbClr val="1C1C1C"/>
+          </a:effectRef>
+          <a:fontRef idx="minor">
+            <a:srgbClr val="EEEEEE"/>
+          </a:fontRef>
+        </p:style>
         <p:txBody>
           <a:bodyPr/>
           <a:lstStyle/>
@@ -4938,12 +4998,10 @@
         <p:nvPr/>
       </p:nvGrpSpPr>
       <p:grpSpPr/>
-      <p:sp xmlns:a="http://schemas.openxmlformats.org/drawingml/2006/main" xmlns:p="http://schemas.openxmlformats.org/presentationml/2006/main">
+      <p:sp>
         <p:nvSpPr>
           <p:cNvPr id="9900" name="_BG_DARK_"/>
-          <p:cNvSpPr>
-            <a:spLocks noSelect="1" noMove="1" noResize="1"/>
-          </p:cNvSpPr>
+          <p:cNvSpPr/>
           <p:nvPr/>
         </p:nvSpPr>
         <p:spPr>
@@ -4961,6 +5019,20 @@
             <a:noFill/>
           </a:ln>
         </p:spPr>
+        <p:style>
+          <a:lnRef idx="1">
+            <a:srgbClr val="1C1C1C"/>
+          </a:lnRef>
+          <a:fillRef idx="1">
+            <a:srgbClr val="1C1C1C"/>
+          </a:fillRef>
+          <a:effectRef idx="0">
+            <a:srgbClr val="1C1C1C"/>
+          </a:effectRef>
+          <a:fontRef idx="minor">
+            <a:srgbClr val="EEEEEE"/>
+          </a:fontRef>
+        </p:style>
         <p:txBody>
           <a:bodyPr/>
           <a:lstStyle/>
@@ -5423,12 +5495,10 @@
         <p:nvPr/>
       </p:nvGrpSpPr>
       <p:grpSpPr/>
-      <p:sp xmlns:a="http://schemas.openxmlformats.org/drawingml/2006/main" xmlns:p="http://schemas.openxmlformats.org/presentationml/2006/main">
+      <p:sp>
         <p:nvSpPr>
           <p:cNvPr id="9900" name="_BG_DARK_"/>
-          <p:cNvSpPr>
-            <a:spLocks noSelect="1" noMove="1" noResize="1"/>
-          </p:cNvSpPr>
+          <p:cNvSpPr/>
           <p:nvPr/>
         </p:nvSpPr>
         <p:spPr>
@@ -5446,6 +5516,20 @@
             <a:noFill/>
           </a:ln>
         </p:spPr>
+        <p:style>
+          <a:lnRef idx="1">
+            <a:srgbClr val="1C1C1C"/>
+          </a:lnRef>
+          <a:fillRef idx="1">
+            <a:srgbClr val="1C1C1C"/>
+          </a:fillRef>
+          <a:effectRef idx="0">
+            <a:srgbClr val="1C1C1C"/>
+          </a:effectRef>
+          <a:fontRef idx="minor">
+            <a:srgbClr val="EEEEEE"/>
+          </a:fontRef>
+        </p:style>
         <p:txBody>
           <a:bodyPr/>
           <a:lstStyle/>
@@ -5623,12 +5707,10 @@
         <p:nvPr/>
       </p:nvGrpSpPr>
       <p:grpSpPr/>
-      <p:sp xmlns:a="http://schemas.openxmlformats.org/drawingml/2006/main" xmlns:p="http://schemas.openxmlformats.org/presentationml/2006/main">
+      <p:sp>
         <p:nvSpPr>
           <p:cNvPr id="9900" name="_BG_DARK_"/>
-          <p:cNvSpPr>
-            <a:spLocks noSelect="1" noMove="1" noResize="1"/>
-          </p:cNvSpPr>
+          <p:cNvSpPr/>
           <p:nvPr/>
         </p:nvSpPr>
         <p:spPr>
@@ -5646,6 +5728,20 @@
             <a:noFill/>
           </a:ln>
         </p:spPr>
+        <p:style>
+          <a:lnRef idx="1">
+            <a:srgbClr val="1C1C1C"/>
+          </a:lnRef>
+          <a:fillRef idx="1">
+            <a:srgbClr val="1C1C1C"/>
+          </a:fillRef>
+          <a:effectRef idx="0">
+            <a:srgbClr val="1C1C1C"/>
+          </a:effectRef>
+          <a:fontRef idx="minor">
+            <a:srgbClr val="EEEEEE"/>
+          </a:fontRef>
+        </p:style>
         <p:txBody>
           <a:bodyPr/>
           <a:lstStyle/>
@@ -5962,12 +6058,10 @@
         <p:nvPr/>
       </p:nvGrpSpPr>
       <p:grpSpPr/>
-      <p:sp xmlns:a="http://schemas.openxmlformats.org/drawingml/2006/main" xmlns:p="http://schemas.openxmlformats.org/presentationml/2006/main">
+      <p:sp>
         <p:nvSpPr>
           <p:cNvPr id="9900" name="_BG_DARK_"/>
-          <p:cNvSpPr>
-            <a:spLocks noSelect="1" noMove="1" noResize="1"/>
-          </p:cNvSpPr>
+          <p:cNvSpPr/>
           <p:nvPr/>
         </p:nvSpPr>
         <p:spPr>
@@ -5985,6 +6079,20 @@
             <a:noFill/>
           </a:ln>
         </p:spPr>
+        <p:style>
+          <a:lnRef idx="1">
+            <a:srgbClr val="1C1C1C"/>
+          </a:lnRef>
+          <a:fillRef idx="1">
+            <a:srgbClr val="1C1C1C"/>
+          </a:fillRef>
+          <a:effectRef idx="0">
+            <a:srgbClr val="1C1C1C"/>
+          </a:effectRef>
+          <a:fontRef idx="minor">
+            <a:srgbClr val="EEEEEE"/>
+          </a:fontRef>
+        </p:style>
         <p:txBody>
           <a:bodyPr/>
           <a:lstStyle/>
@@ -6615,12 +6723,10 @@
         <p:nvPr/>
       </p:nvGrpSpPr>
       <p:grpSpPr/>
-      <p:sp xmlns:a="http://schemas.openxmlformats.org/drawingml/2006/main" xmlns:p="http://schemas.openxmlformats.org/presentationml/2006/main">
+      <p:sp>
         <p:nvSpPr>
           <p:cNvPr id="9900" name="_BG_DARK_"/>
-          <p:cNvSpPr>
-            <a:spLocks noSelect="1" noMove="1" noResize="1"/>
-          </p:cNvSpPr>
+          <p:cNvSpPr/>
           <p:nvPr/>
         </p:nvSpPr>
         <p:spPr>
@@ -6638,6 +6744,20 @@
             <a:noFill/>
           </a:ln>
         </p:spPr>
+        <p:style>
+          <a:lnRef idx="1">
+            <a:srgbClr val="1C1C1C"/>
+          </a:lnRef>
+          <a:fillRef idx="1">
+            <a:srgbClr val="1C1C1C"/>
+          </a:fillRef>
+          <a:effectRef idx="0">
+            <a:srgbClr val="1C1C1C"/>
+          </a:effectRef>
+          <a:fontRef idx="minor">
+            <a:srgbClr val="EEEEEE"/>
+          </a:fontRef>
+        </p:style>
         <p:txBody>
           <a:bodyPr/>
           <a:lstStyle/>
@@ -6849,12 +6969,10 @@
         <p:nvPr/>
       </p:nvGrpSpPr>
       <p:grpSpPr/>
-      <p:sp xmlns:a="http://schemas.openxmlformats.org/drawingml/2006/main" xmlns:p="http://schemas.openxmlformats.org/presentationml/2006/main">
+      <p:sp>
         <p:nvSpPr>
           <p:cNvPr id="9900" name="_BG_DARK_"/>
-          <p:cNvSpPr>
-            <a:spLocks noSelect="1" noMove="1" noResize="1"/>
-          </p:cNvSpPr>
+          <p:cNvSpPr/>
           <p:nvPr/>
         </p:nvSpPr>
         <p:spPr>
@@ -6872,6 +6990,20 @@
             <a:noFill/>
           </a:ln>
         </p:spPr>
+        <p:style>
+          <a:lnRef idx="1">
+            <a:srgbClr val="1C1C1C"/>
+          </a:lnRef>
+          <a:fillRef idx="1">
+            <a:srgbClr val="1C1C1C"/>
+          </a:fillRef>
+          <a:effectRef idx="0">
+            <a:srgbClr val="1C1C1C"/>
+          </a:effectRef>
+          <a:fontRef idx="minor">
+            <a:srgbClr val="EEEEEE"/>
+          </a:fontRef>
+        </p:style>
         <p:txBody>
           <a:bodyPr/>
           <a:lstStyle/>
@@ -7283,12 +7415,10 @@
         <p:nvPr/>
       </p:nvGrpSpPr>
       <p:grpSpPr/>
-      <p:sp xmlns:a="http://schemas.openxmlformats.org/drawingml/2006/main" xmlns:p="http://schemas.openxmlformats.org/presentationml/2006/main">
+      <p:sp>
         <p:nvSpPr>
           <p:cNvPr id="9900" name="_BG_DARK_"/>
-          <p:cNvSpPr>
-            <a:spLocks noSelect="1" noMove="1" noResize="1"/>
-          </p:cNvSpPr>
+          <p:cNvSpPr/>
           <p:nvPr/>
         </p:nvSpPr>
         <p:spPr>
@@ -7306,6 +7436,20 @@
             <a:noFill/>
           </a:ln>
         </p:spPr>
+        <p:style>
+          <a:lnRef idx="1">
+            <a:srgbClr val="1C1C1C"/>
+          </a:lnRef>
+          <a:fillRef idx="1">
+            <a:srgbClr val="1C1C1C"/>
+          </a:fillRef>
+          <a:effectRef idx="0">
+            <a:srgbClr val="1C1C1C"/>
+          </a:effectRef>
+          <a:fontRef idx="minor">
+            <a:srgbClr val="EEEEEE"/>
+          </a:fontRef>
+        </p:style>
         <p:txBody>
           <a:bodyPr/>
           <a:lstStyle/>
@@ -7517,12 +7661,10 @@
         <p:nvPr/>
       </p:nvGrpSpPr>
       <p:grpSpPr/>
-      <p:sp xmlns:a="http://schemas.openxmlformats.org/drawingml/2006/main" xmlns:p="http://schemas.openxmlformats.org/presentationml/2006/main">
+      <p:sp>
         <p:nvSpPr>
           <p:cNvPr id="9900" name="_BG_DARK_"/>
-          <p:cNvSpPr>
-            <a:spLocks noSelect="1" noMove="1" noResize="1"/>
-          </p:cNvSpPr>
+          <p:cNvSpPr/>
           <p:nvPr/>
         </p:nvSpPr>
         <p:spPr>
@@ -7540,6 +7682,20 @@
             <a:noFill/>
           </a:ln>
         </p:spPr>
+        <p:style>
+          <a:lnRef idx="1">
+            <a:srgbClr val="1C1C1C"/>
+          </a:lnRef>
+          <a:fillRef idx="1">
+            <a:srgbClr val="1C1C1C"/>
+          </a:fillRef>
+          <a:effectRef idx="0">
+            <a:srgbClr val="1C1C1C"/>
+          </a:effectRef>
+          <a:fontRef idx="minor">
+            <a:srgbClr val="EEEEEE"/>
+          </a:fontRef>
+        </p:style>
         <p:txBody>
           <a:bodyPr/>
           <a:lstStyle/>
@@ -8135,12 +8291,10 @@
         <p:nvPr/>
       </p:nvGrpSpPr>
       <p:grpSpPr/>
-      <p:sp xmlns:a="http://schemas.openxmlformats.org/drawingml/2006/main" xmlns:p="http://schemas.openxmlformats.org/presentationml/2006/main">
+      <p:sp>
         <p:nvSpPr>
           <p:cNvPr id="9900" name="_BG_DARK_"/>
-          <p:cNvSpPr>
-            <a:spLocks noSelect="1" noMove="1" noResize="1"/>
-          </p:cNvSpPr>
+          <p:cNvSpPr/>
           <p:nvPr/>
         </p:nvSpPr>
         <p:spPr>
@@ -8158,6 +8312,20 @@
             <a:noFill/>
           </a:ln>
         </p:spPr>
+        <p:style>
+          <a:lnRef idx="1">
+            <a:srgbClr val="1C1C1C"/>
+          </a:lnRef>
+          <a:fillRef idx="1">
+            <a:srgbClr val="1C1C1C"/>
+          </a:fillRef>
+          <a:effectRef idx="0">
+            <a:srgbClr val="1C1C1C"/>
+          </a:effectRef>
+          <a:fontRef idx="minor">
+            <a:srgbClr val="EEEEEE"/>
+          </a:fontRef>
+        </p:style>
         <p:txBody>
           <a:bodyPr/>
           <a:lstStyle/>
@@ -8620,12 +8788,10 @@
         <p:nvPr/>
       </p:nvGrpSpPr>
       <p:grpSpPr/>
-      <p:sp xmlns:a="http://schemas.openxmlformats.org/drawingml/2006/main" xmlns:p="http://schemas.openxmlformats.org/presentationml/2006/main">
+      <p:sp>
         <p:nvSpPr>
           <p:cNvPr id="9900" name="_BG_DARK_"/>
-          <p:cNvSpPr>
-            <a:spLocks noSelect="1" noMove="1" noResize="1"/>
-          </p:cNvSpPr>
+          <p:cNvSpPr/>
           <p:nvPr/>
         </p:nvSpPr>
         <p:spPr>
@@ -8643,6 +8809,20 @@
             <a:noFill/>
           </a:ln>
         </p:spPr>
+        <p:style>
+          <a:lnRef idx="1">
+            <a:srgbClr val="1C1C1C"/>
+          </a:lnRef>
+          <a:fillRef idx="1">
+            <a:srgbClr val="1C1C1C"/>
+          </a:fillRef>
+          <a:effectRef idx="0">
+            <a:srgbClr val="1C1C1C"/>
+          </a:effectRef>
+          <a:fontRef idx="minor">
+            <a:srgbClr val="EEEEEE"/>
+          </a:fontRef>
+        </p:style>
         <p:txBody>
           <a:bodyPr/>
           <a:lstStyle/>
@@ -8854,12 +9034,10 @@
         <p:nvPr/>
       </p:nvGrpSpPr>
       <p:grpSpPr/>
-      <p:sp xmlns:a="http://schemas.openxmlformats.org/drawingml/2006/main" xmlns:p="http://schemas.openxmlformats.org/presentationml/2006/main">
+      <p:sp>
         <p:nvSpPr>
           <p:cNvPr id="9900" name="_BG_DARK_"/>
-          <p:cNvSpPr>
-            <a:spLocks noSelect="1" noMove="1" noResize="1"/>
-          </p:cNvSpPr>
+          <p:cNvSpPr/>
           <p:nvPr/>
         </p:nvSpPr>
         <p:spPr>
@@ -8877,6 +9055,20 @@
             <a:noFill/>
           </a:ln>
         </p:spPr>
+        <p:style>
+          <a:lnRef idx="1">
+            <a:srgbClr val="1C1C1C"/>
+          </a:lnRef>
+          <a:fillRef idx="1">
+            <a:srgbClr val="1C1C1C"/>
+          </a:fillRef>
+          <a:effectRef idx="0">
+            <a:srgbClr val="1C1C1C"/>
+          </a:effectRef>
+          <a:fontRef idx="minor">
+            <a:srgbClr val="EEEEEE"/>
+          </a:fontRef>
+        </p:style>
         <p:txBody>
           <a:bodyPr/>
           <a:lstStyle/>

--- a/00-01_han-ai/training-materials/course02_jissen_bunsho.pptx
+++ b/00-01_han-ai/training-materials/course02_jissen_bunsho.pptx
@@ -6356,7 +6356,7 @@
                             <a:srgbClr val="EEEEEE"/>
                           </a:solidFill>
                         </a:rPr>
-                        <a:t>社内文書（議事録・メール・報告書）</a:t>
+                        <a:t>社内文書（議事録・クレーム対応メール）</a:t>
                       </a:r>
                     </a:p>
                   </a:txBody>
@@ -6420,7 +6420,7 @@
                             <a:srgbClr val="EEEEEE"/>
                           </a:solidFill>
                         </a:rPr>
-                        <a:t>広報・発信文書（SNS・チラシ・HP）</a:t>
+                        <a:t>文書→表データ変換（議事録→タスク表・アンケート→集計分類表）</a:t>
                       </a:r>
                     </a:p>
                   </a:txBody>
@@ -6544,7 +6544,7 @@
                             <a:srgbClr val="EEEEEE"/>
                           </a:solidFill>
                         </a:rPr>
-                        <a:t>採用広報（求人票・会社紹介文）</a:t>
+                        <a:t>表→文書一括生成（商品リスト→SNS投稿・顧客リスト→フォローメール）</a:t>
                       </a:r>
                     </a:p>
                   </a:txBody>
@@ -6586,11 +6586,7 @@
                       </a:r>
                     </a:p>
                   </a:txBody>
-                  <a:tcPr>
-                    <a:solidFill>
-                      <a:srgbClr val="F8FAFC"/>
-                    </a:solidFill>
-                  </a:tcPr>
+                  <a:tcPr/>
                 </a:tc>
                 <a:tc>
                   <a:txBody>
@@ -6604,15 +6600,11 @@
                             <a:srgbClr val="EEEEEE"/>
                           </a:solidFill>
                         </a:rPr>
-                        <a:t>ライブラリ化・保存</a:t>
-                      </a:r>
-                    </a:p>
-                  </a:txBody>
-                  <a:tcPr>
-                    <a:solidFill>
-                      <a:srgbClr val="F8FAFC"/>
-                    </a:solidFill>
-                  </a:tcPr>
+                        <a:t>まとめ</a:t>
+                      </a:r>
+                    </a:p>
+                  </a:txBody>
+                  <a:tcPr/>
                 </a:tc>
                 <a:tc>
                   <a:txBody>
@@ -6626,67 +6618,7 @@
                             <a:srgbClr val="EEEEEE"/>
                           </a:solidFill>
                         </a:rPr>
-                        <a:t>5分</a:t>
-                      </a:r>
-                    </a:p>
-                  </a:txBody>
-                  <a:tcPr>
-                    <a:solidFill>
-                      <a:srgbClr val="F8FAFC"/>
-                    </a:solidFill>
-                  </a:tcPr>
-                </a:tc>
-              </a:tr>
-              <a:tr h="525780">
-                <a:tc>
-                  <a:txBody>
-                    <a:bodyPr wrap="square"/>
-                    <a:lstStyle/>
-                    <a:p>
-                      <a:pPr algn="l"/>
-                      <a:r>
-                        <a:rPr sz="1100">
-                          <a:solidFill>
-                            <a:srgbClr val="EEEEEE"/>
-                          </a:solidFill>
-                        </a:rPr>
-                        <a:t>6</a:t>
-                      </a:r>
-                    </a:p>
-                  </a:txBody>
-                  <a:tcPr/>
-                </a:tc>
-                <a:tc>
-                  <a:txBody>
-                    <a:bodyPr wrap="square"/>
-                    <a:lstStyle/>
-                    <a:p>
-                      <a:pPr algn="l"/>
-                      <a:r>
-                        <a:rPr sz="1100">
-                          <a:solidFill>
-                            <a:srgbClr val="EEEEEE"/>
-                          </a:solidFill>
-                        </a:rPr>
-                        <a:t>まとめ</a:t>
-                      </a:r>
-                    </a:p>
-                  </a:txBody>
-                  <a:tcPr/>
-                </a:tc>
-                <a:tc>
-                  <a:txBody>
-                    <a:bodyPr wrap="square"/>
-                    <a:lstStyle/>
-                    <a:p>
-                      <a:pPr algn="l"/>
-                      <a:r>
-                        <a:rPr sz="1100">
-                          <a:solidFill>
-                            <a:srgbClr val="EEEEEE"/>
-                          </a:solidFill>
-                        </a:rPr>
-                        <a:t>5分</a:t>
+                        <a:t>8分</a:t>
                       </a:r>
                     </a:p>
                   </a:txBody>

--- a/00-01_han-ai/training-materials/course02_jissen_bunsho.pptx
+++ b/00-01_han-ai/training-materials/course02_jissen_bunsho.pptx
@@ -3662,7 +3662,7 @@
                   <a:srgbClr val="64748B"/>
                 </a:solidFill>
               </a:rPr>
-              <a:t>お題：「このアンケート回答をカテゴリ別に集計してまとめた表を作って」</a:t>
+              <a:t>お題：「このアンケート回答を『満足点・改善要望・その他』の3列に分類してCSV形式の表にして」</a:t>
             </a:r>
           </a:p>
           <a:p>
@@ -3710,7 +3710,7 @@
                             <a:srgbClr val="FFFFFF"/>
                           </a:solidFill>
                         </a:rPr>
-                        <a:t>テーマ</a:t>
+                        <a:t>手順</a:t>
                       </a:r>
                     </a:p>
                   </a:txBody>
@@ -3732,7 +3732,7 @@
                             <a:srgbClr val="FFFFFF"/>
                           </a:solidFill>
                         </a:rPr>
-                        <a:t>使い道・例</a:t>
+                        <a:t>内容</a:t>
                       </a:r>
                     </a:p>
                   </a:txBody>
@@ -3756,7 +3756,7 @@
                             <a:srgbClr val="EEEEEE"/>
                           </a:solidFill>
                         </a:rPr>
-                        <a:t>チラシ・DM文案</a:t>
+                        <a:t>1 シートを開く</a:t>
                       </a:r>
                     </a:p>
                   </a:txBody>
@@ -3774,7 +3774,7 @@
                             <a:srgbClr val="EEEEEE"/>
                           </a:solidFill>
                         </a:rPr>
-                        <a:t>イベント告知・セール・新商品紹介チラシのコピー</a:t>
+                        <a:t>スライドのURLからアンケート回答のスプレッドシートを開く</a:t>
                       </a:r>
                     </a:p>
                   </a:txBody>
@@ -3794,7 +3794,7 @@
                             <a:srgbClr val="EEEEEE"/>
                           </a:solidFill>
                         </a:rPr>
-                        <a:t>HP更新テキスト</a:t>
+                        <a:t>2 全選択してコピー</a:t>
                       </a:r>
                     </a:p>
                   </a:txBody>
@@ -3816,7 +3816,7 @@
                             <a:srgbClr val="EEEEEE"/>
                           </a:solidFill>
                         </a:rPr>
-                        <a:t>会社紹介・サービス説明・ニュースページの文章</a:t>
+                        <a:t>Ctrl+A → Ctrl+C でシート全体をコピー</a:t>
                       </a:r>
                     </a:p>
                   </a:txBody>
@@ -3840,7 +3840,7 @@
                             <a:srgbClr val="EEEEEE"/>
                           </a:solidFill>
                         </a:rPr>
-                        <a:t>メルマガ・ニュースレター</a:t>
+                        <a:t>3 Geminiに貼り付け</a:t>
                       </a:r>
                     </a:p>
                   </a:txBody>
@@ -3858,7 +3858,7 @@
                             <a:srgbClr val="EEEEEE"/>
                           </a:solidFill>
                         </a:rPr>
-                        <a:t>定期配信の構成と文面をたたき台で作る</a:t>
+                        <a:t>貼り付けて指示を入力：「満足点・改善要望・その他の3列に分類してCSV形式の表にして」</a:t>
                       </a:r>
                     </a:p>
                   </a:txBody>
@@ -3878,7 +3878,7 @@
                             <a:srgbClr val="EEEEEE"/>
                           </a:solidFill>
                         </a:rPr>
-                        <a:t>プレスリリース</a:t>
+                        <a:t>4 出力を確認</a:t>
                       </a:r>
                     </a:p>
                   </a:txBody>
@@ -3900,7 +3900,7 @@
                             <a:srgbClr val="EEEEEE"/>
                           </a:solidFill>
                         </a:rPr>
-                        <a:t>新サービス・受賞・採用募集などの告知文</a:t>
+                        <a:t>バラバラな声が3列に分類されることを確認</a:t>
                       </a:r>
                     </a:p>
                   </a:txBody>
@@ -3924,7 +3924,7 @@
                             <a:srgbClr val="EEEEEE"/>
                           </a:solidFill>
                         </a:rPr>
-                        <a:t>キャッチコピー案</a:t>
+                        <a:t>5 シートに貼り直す</a:t>
                       </a:r>
                     </a:p>
                   </a:txBody>
@@ -3942,7 +3942,7 @@
                             <a:srgbClr val="EEEEEE"/>
                           </a:solidFill>
                         </a:rPr>
-                        <a:t>商品・サービスの魅力を一言で伝えるフレーズを複数案出す</a:t>
+                        <a:t>生成されたCSVをスプレッドシートに貼り付ければそのまま資料になる</a:t>
                       </a:r>
                     </a:p>
                   </a:txBody>
@@ -4583,7 +4583,7 @@
                   <a:srgbClr val="EEEEEE"/>
                 </a:solidFill>
               </a:rPr>
-              <a:t>お題：「この商品リストの各商品についてInstagram投稿文を1本ずつ作って」</a:t>
+              <a:t>お題：「この商品リストの各商品のInstagram投稿文をハッシュタグ5個込みで作って」</a:t>
             </a:r>
           </a:p>
           <a:p>
@@ -4718,7 +4718,7 @@
                             <a:srgbClr val="EEEEEE"/>
                           </a:solidFill>
                         </a:rPr>
-                        <a:t>募集職種と最低限の条件（給与・勤務地・仕事内容）を手元に用意</a:t>
+                        <a:t>スライドのURLから商品リストのスプレッドシートを開く</a:t>
                       </a:r>
                     </a:p>
                   </a:txBody>
@@ -4778,7 +4778,7 @@
                             <a:srgbClr val="EEEEEE"/>
                           </a:solidFill>
                         </a:rPr>
-                        <a:t>「未経験歓迎・自社の強み・応募しやすいポイント」も含めてプロンプト入力</a:t>
+                        <a:t>全選択コピー（Ctrl+A → Ctrl+C）→ Geminiに貼り付け</a:t>
                       </a:r>
                     </a:p>
                   </a:txBody>
@@ -4842,7 +4842,7 @@
                             <a:srgbClr val="EEEEEE"/>
                           </a:solidFill>
                         </a:rPr>
-                        <a:t>出力確認 → 「もう少し求職者の不安を解消する言い方に」等で調整</a:t>
+                        <a:t>指示を入力：「各商品のInstagram投稿文をハッシュタグ5個込みで作って」→ 一括生成を確認</a:t>
                       </a:r>
                     </a:p>
                   </a:txBody>
@@ -4902,7 +4902,7 @@
                             <a:srgbClr val="EEEEEE"/>
                           </a:solidFill>
                         </a:rPr>
-                        <a:t>見せ合い・感想共有</a:t>
+                        <a:t>質問・個別サポート</a:t>
                       </a:r>
                     </a:p>
                   </a:txBody>
@@ -5226,7 +5226,7 @@
                             <a:srgbClr val="FFFFFF"/>
                           </a:solidFill>
                         </a:rPr>
-                        <a:t>テーマ</a:t>
+                        <a:t>手順</a:t>
                       </a:r>
                     </a:p>
                   </a:txBody>
@@ -5248,7 +5248,7 @@
                             <a:srgbClr val="FFFFFF"/>
                           </a:solidFill>
                         </a:rPr>
-                        <a:t>使い道・例</a:t>
+                        <a:t>内容</a:t>
                       </a:r>
                     </a:p>
                   </a:txBody>
@@ -5272,7 +5272,7 @@
                             <a:srgbClr val="EEEEEE"/>
                           </a:solidFill>
                         </a:rPr>
-                        <a:t>会社紹介文</a:t>
+                        <a:t>1 シートを開く</a:t>
                       </a:r>
                     </a:p>
                   </a:txBody>
@@ -5290,7 +5290,7 @@
                             <a:srgbClr val="EEEEEE"/>
                           </a:solidFill>
                         </a:rPr>
-                        <a:t>採用ページ・合同説明会・会社案内の文章を作る</a:t>
+                        <a:t>スライドのURLから顧客リストのスプレッドシートを開く</a:t>
                       </a:r>
                     </a:p>
                   </a:txBody>
@@ -5310,7 +5310,7 @@
                             <a:srgbClr val="EEEEEE"/>
                           </a:solidFill>
                         </a:rPr>
-                        <a:t>採用広報SNS投稿</a:t>
+                        <a:t>2 全選択してコピー</a:t>
                       </a:r>
                     </a:p>
                   </a:txBody>
@@ -5332,7 +5332,7 @@
                             <a:srgbClr val="EEEEEE"/>
                           </a:solidFill>
                         </a:rPr>
-                        <a:t>社員の一日・職場環境・理念を発信する投稿文</a:t>
+                        <a:t>Ctrl+A → Ctrl+C でシート全体をコピー</a:t>
                       </a:r>
                     </a:p>
                   </a:txBody>
@@ -5356,7 +5356,7 @@
                             <a:srgbClr val="EEEEEE"/>
                           </a:solidFill>
                         </a:rPr>
-                        <a:t>面接でよく聞く質問リスト</a:t>
+                        <a:t>3 Geminiに貼り付け</a:t>
                       </a:r>
                     </a:p>
                   </a:txBody>
@@ -5374,7 +5374,7 @@
                             <a:srgbClr val="EEEEEE"/>
                           </a:solidFill>
                         </a:rPr>
-                        <a:t>職種別の想定質問と評価ポイントをまとめる</a:t>
+                        <a:t>貼り付けて指示を入力：「各社に向けた個別のフォローアップメールを作って」</a:t>
                       </a:r>
                     </a:p>
                   </a:txBody>
@@ -5394,7 +5394,7 @@
                             <a:srgbClr val="EEEEEE"/>
                           </a:solidFill>
                         </a:rPr>
-                        <a:t>内定通知文</a:t>
+                        <a:t>4 指示のポイント</a:t>
                       </a:r>
                     </a:p>
                   </a:txBody>
@@ -5416,7 +5416,7 @@
                             <a:srgbClr val="EEEEEE"/>
                           </a:solidFill>
                         </a:rPr>
-                        <a:t>内定のご連絡メール・書面のたたき台</a:t>
+                        <a:t>「最終接触日をふまえて自然な書き出しにして」と添える</a:t>
                       </a:r>
                     </a:p>
                   </a:txBody>
@@ -5440,7 +5440,7 @@
                             <a:srgbClr val="EEEEEE"/>
                           </a:solidFill>
                         </a:rPr>
-                        <a:t>入社前案内文</a:t>
+                        <a:t>5 結果を確認</a:t>
                       </a:r>
                     </a:p>
                   </a:txBody>
@@ -5458,7 +5458,7 @@
                             <a:srgbClr val="EEEEEE"/>
                           </a:solidFill>
                         </a:rPr>
-                        <a:t>初日の持ち物・手続き・注意事項をまとめた案内文</a:t>
+                        <a:t>最終接触日に応じて文面が変わっていることを確認</a:t>
                       </a:r>
                     </a:p>
                   </a:txBody>
@@ -7234,7 +7234,7 @@
                             <a:srgbClr val="EEEEEE"/>
                           </a:solidFill>
                         </a:rPr>
-                        <a:t>文書系3カテゴリ（社内・広報・採用）でプロンプトを作り、10本ライブラリ化して持ち帰る</a:t>
+                        <a:t>3方向（文書生成・文書→表・表→文書）を実践してプロンプトの感覚をつかむ</a:t>
                       </a:r>
                     </a:p>
                   </a:txBody>
@@ -7942,7 +7942,7 @@
                             <a:srgbClr val="EEEEEE"/>
                           </a:solidFill>
                         </a:rPr>
-                        <a:t>発言メモを手元に準備（なければ架空で可）</a:t>
+                        <a:t>スライドのサンプル発言メモを使う（自分の会議メモでも可）</a:t>
                       </a:r>
                     </a:p>
                   </a:txBody>
@@ -8126,7 +8126,7 @@
                             <a:srgbClr val="EEEEEE"/>
                           </a:solidFill>
                         </a:rPr>
-                        <a:t>見せ合い・感想共有</a:t>
+                        <a:t>質問・個別サポート</a:t>
                       </a:r>
                     </a:p>
                   </a:txBody>
@@ -8403,7 +8403,7 @@
                   <a:srgbClr val="64748B"/>
                 </a:solidFill>
               </a:rPr>
-              <a:t>お題：「先週受けたクレームのメモを渡すから、丁寧なお詫びと対応策のメールを書いて」</a:t>
+              <a:t>お題：「あなたは営業担当者です。納品した商品の不具合連絡に、誠実に謝罪し代替品を翌日発送する旨を300字以内のメールで」</a:t>
             </a:r>
           </a:p>
           <a:p>
@@ -9189,7 +9189,7 @@
                   <a:srgbClr val="EEEEEE"/>
                 </a:solidFill>
               </a:rPr>
-              <a:t>お題：「この議事録から担当者・タスク・期限の一覧表を作って、CSVで出力して」</a:t>
+              <a:t>お題：「この議事録から決定事項・担当者・期限をGoogleシート用のCSV形式の表にして」</a:t>
             </a:r>
           </a:p>
         </p:txBody>
@@ -9314,7 +9314,7 @@
                             <a:srgbClr val="EEEEEE"/>
                           </a:solidFill>
                         </a:rPr>
-                        <a:t>自社の投稿テーマを決める（商品紹介・イベント・お知らせ等）</a:t>
+                        <a:t>Section 2で作った議事録をコピーして手元に置く</a:t>
                       </a:r>
                     </a:p>
                   </a:txBody>
@@ -9374,7 +9374,7 @@
                             <a:srgbClr val="EEEEEE"/>
                           </a:solidFill>
                         </a:rPr>
-                        <a:t>プロンプト入力：「会社名・業種・投稿テーマ・ハッシュタグの有無」を指定</a:t>
+                        <a:t>指示を入力：「この議事録から決定事項・担当者・期限をCSV形式の表にして」</a:t>
                       </a:r>
                     </a:p>
                   </a:txBody>
@@ -9438,7 +9438,7 @@
                             <a:srgbClr val="EEEEEE"/>
                           </a:solidFill>
                         </a:rPr>
-                        <a:t>出力確認 → 「もっとカジュアルに」「絵文字を増やして」等で調整</a:t>
+                        <a:t>生成されたCSVをGoogleシートに貼り付けて確認</a:t>
                       </a:r>
                     </a:p>
                   </a:txBody>
@@ -9498,7 +9498,7 @@
                             <a:srgbClr val="EEEEEE"/>
                           </a:solidFill>
                         </a:rPr>
-                        <a:t>見せ合い・感想共有</a:t>
+                        <a:t>質問・個別サポート</a:t>
                       </a:r>
                     </a:p>
                   </a:txBody>
